--- a/static/ppts/G8_Sci_Human_Impact.pptx
+++ b/static/ppts/G8_Sci_Human_Impact.pptx
@@ -10,9 +10,13 @@
     <p:sldId id="258" r:id="rId4"/>
     <p:sldId id="259" r:id="rId5"/>
     <p:sldId id="260" r:id="rId6"/>
+    <p:sldId id="261" r:id="rId7"/>
+    <p:sldId id="262" r:id="rId8"/>
+    <p:sldId id="263" r:id="rId9"/>
+    <p:sldId id="264" r:id="rId10"/>
   </p:sldIdLst>
   <p:notesMasterIdLst>
-    <p:notesMasterId r:id="rId7"/>
+    <p:notesMasterId r:id="rId11"/>
   </p:notesMasterIdLst>
   <p:sldSz cx="9144000" cy="5143500"/>
   <p:notesSz cx="5143500" cy="9144000"/>
@@ -900,6 +904,358 @@
 </p:notes>
 </file>
 
+<file path=ppt/notesSlides/notesSlide6.xml><?xml version="1.0" encoding="utf-8"?>
+<p:notes xmlns:a="http://schemas.openxmlformats.org/drawingml/2006/main" xmlns:r="http://schemas.openxmlformats.org/officeDocument/2006/relationships" xmlns:p="http://schemas.openxmlformats.org/presentationml/2006/main">
+  <p:cSld>
+    <p:spTree>
+      <p:nvGrpSpPr>
+        <p:cNvPr id="1" name=""/>
+        <p:cNvGrpSpPr/>
+        <p:nvPr/>
+      </p:nvGrpSpPr>
+      <p:grpSpPr>
+        <a:xfrm>
+          <a:off x="0" y="0"/>
+          <a:ext cx="0" cy="0"/>
+          <a:chOff x="0" y="0"/>
+          <a:chExt cx="0" cy="0"/>
+        </a:xfrm>
+      </p:grpSpPr>
+      <p:sp>
+        <p:nvSpPr>
+          <p:cNvPr id="2" name="Slide Image Placeholder 1"/>
+          <p:cNvSpPr>
+            <a:spLocks noGrp="1" noRot="1" noChangeAspect="1"/>
+          </p:cNvSpPr>
+          <p:nvPr>
+            <p:ph type="sldImg"/>
+          </p:nvPr>
+        </p:nvSpPr>
+        <p:spPr/>
+      </p:sp>
+      <p:sp>
+        <p:nvSpPr>
+          <p:cNvPr id="3" name="Notes Placeholder 2"/>
+          <p:cNvSpPr>
+            <a:spLocks noGrp="1"/>
+          </p:cNvSpPr>
+          <p:nvPr>
+            <p:ph type="body" idx="1"/>
+          </p:nvPr>
+        </p:nvSpPr>
+        <p:spPr/>
+        <p:txBody>
+          <a:bodyPr/>
+          <a:lstStyle/>
+          <a:p>
+            <a:r>
+              <a:rPr lang="en-US" dirty="0"/>
+              <a:t/>
+            </a:r>
+            <a:endParaRPr lang="en-US" dirty="0"/>
+          </a:p>
+        </p:txBody>
+      </p:sp>
+      <p:sp>
+        <p:nvSpPr>
+          <p:cNvPr id="4" name="Slide Number Placeholder 3"/>
+          <p:cNvSpPr>
+            <a:spLocks noGrp="1"/>
+          </p:cNvSpPr>
+          <p:nvPr>
+            <p:ph type="sldNum" sz="quarter" idx="10"/>
+          </p:nvPr>
+        </p:nvSpPr>
+        <p:spPr/>
+        <p:txBody>
+          <a:bodyPr/>
+          <a:lstStyle/>
+          <a:p>
+            <a:fld id="{F7021451-1387-4CA6-816F-3879F97B5CBC}" type="slidenum">
+              <a:rPr lang="en-US"/>
+              <a:t>6</a:t>
+            </a:fld>
+            <a:endParaRPr lang="en-US"/>
+          </a:p>
+        </p:txBody>
+      </p:sp>
+    </p:spTree>
+    <p:extLst>
+      <p:ext uri="{BB962C8B-B14F-4D97-AF65-F5344CB8AC3E}">
+        <p14:creationId xmlns:p14="http://schemas.microsoft.com/office/powerpoint/2010/main" val="1024086991"/>
+      </p:ext>
+    </p:extLst>
+  </p:cSld>
+  <p:clrMapOvr>
+    <a:masterClrMapping/>
+  </p:clrMapOvr>
+</p:notes>
+</file>
+
+<file path=ppt/notesSlides/notesSlide7.xml><?xml version="1.0" encoding="utf-8"?>
+<p:notes xmlns:a="http://schemas.openxmlformats.org/drawingml/2006/main" xmlns:r="http://schemas.openxmlformats.org/officeDocument/2006/relationships" xmlns:p="http://schemas.openxmlformats.org/presentationml/2006/main">
+  <p:cSld>
+    <p:spTree>
+      <p:nvGrpSpPr>
+        <p:cNvPr id="1" name=""/>
+        <p:cNvGrpSpPr/>
+        <p:nvPr/>
+      </p:nvGrpSpPr>
+      <p:grpSpPr>
+        <a:xfrm>
+          <a:off x="0" y="0"/>
+          <a:ext cx="0" cy="0"/>
+          <a:chOff x="0" y="0"/>
+          <a:chExt cx="0" cy="0"/>
+        </a:xfrm>
+      </p:grpSpPr>
+      <p:sp>
+        <p:nvSpPr>
+          <p:cNvPr id="2" name="Slide Image Placeholder 1"/>
+          <p:cNvSpPr>
+            <a:spLocks noGrp="1" noRot="1" noChangeAspect="1"/>
+          </p:cNvSpPr>
+          <p:nvPr>
+            <p:ph type="sldImg"/>
+          </p:nvPr>
+        </p:nvSpPr>
+        <p:spPr/>
+      </p:sp>
+      <p:sp>
+        <p:nvSpPr>
+          <p:cNvPr id="3" name="Notes Placeholder 2"/>
+          <p:cNvSpPr>
+            <a:spLocks noGrp="1"/>
+          </p:cNvSpPr>
+          <p:nvPr>
+            <p:ph type="body" idx="1"/>
+          </p:nvPr>
+        </p:nvSpPr>
+        <p:spPr/>
+        <p:txBody>
+          <a:bodyPr/>
+          <a:lstStyle/>
+          <a:p>
+            <a:r>
+              <a:rPr lang="en-US" dirty="0"/>
+              <a:t/>
+            </a:r>
+            <a:endParaRPr lang="en-US" dirty="0"/>
+          </a:p>
+        </p:txBody>
+      </p:sp>
+      <p:sp>
+        <p:nvSpPr>
+          <p:cNvPr id="4" name="Slide Number Placeholder 3"/>
+          <p:cNvSpPr>
+            <a:spLocks noGrp="1"/>
+          </p:cNvSpPr>
+          <p:nvPr>
+            <p:ph type="sldNum" sz="quarter" idx="10"/>
+          </p:nvPr>
+        </p:nvSpPr>
+        <p:spPr/>
+        <p:txBody>
+          <a:bodyPr/>
+          <a:lstStyle/>
+          <a:p>
+            <a:fld id="{F7021451-1387-4CA6-816F-3879F97B5CBC}" type="slidenum">
+              <a:rPr lang="en-US"/>
+              <a:t>7</a:t>
+            </a:fld>
+            <a:endParaRPr lang="en-US"/>
+          </a:p>
+        </p:txBody>
+      </p:sp>
+    </p:spTree>
+    <p:extLst>
+      <p:ext uri="{BB962C8B-B14F-4D97-AF65-F5344CB8AC3E}">
+        <p14:creationId xmlns:p14="http://schemas.microsoft.com/office/powerpoint/2010/main" val="1024086991"/>
+      </p:ext>
+    </p:extLst>
+  </p:cSld>
+  <p:clrMapOvr>
+    <a:masterClrMapping/>
+  </p:clrMapOvr>
+</p:notes>
+</file>
+
+<file path=ppt/notesSlides/notesSlide8.xml><?xml version="1.0" encoding="utf-8"?>
+<p:notes xmlns:a="http://schemas.openxmlformats.org/drawingml/2006/main" xmlns:r="http://schemas.openxmlformats.org/officeDocument/2006/relationships" xmlns:p="http://schemas.openxmlformats.org/presentationml/2006/main">
+  <p:cSld>
+    <p:spTree>
+      <p:nvGrpSpPr>
+        <p:cNvPr id="1" name=""/>
+        <p:cNvGrpSpPr/>
+        <p:nvPr/>
+      </p:nvGrpSpPr>
+      <p:grpSpPr>
+        <a:xfrm>
+          <a:off x="0" y="0"/>
+          <a:ext cx="0" cy="0"/>
+          <a:chOff x="0" y="0"/>
+          <a:chExt cx="0" cy="0"/>
+        </a:xfrm>
+      </p:grpSpPr>
+      <p:sp>
+        <p:nvSpPr>
+          <p:cNvPr id="2" name="Slide Image Placeholder 1"/>
+          <p:cNvSpPr>
+            <a:spLocks noGrp="1" noRot="1" noChangeAspect="1"/>
+          </p:cNvSpPr>
+          <p:nvPr>
+            <p:ph type="sldImg"/>
+          </p:nvPr>
+        </p:nvSpPr>
+        <p:spPr/>
+      </p:sp>
+      <p:sp>
+        <p:nvSpPr>
+          <p:cNvPr id="3" name="Notes Placeholder 2"/>
+          <p:cNvSpPr>
+            <a:spLocks noGrp="1"/>
+          </p:cNvSpPr>
+          <p:nvPr>
+            <p:ph type="body" idx="1"/>
+          </p:nvPr>
+        </p:nvSpPr>
+        <p:spPr/>
+        <p:txBody>
+          <a:bodyPr/>
+          <a:lstStyle/>
+          <a:p>
+            <a:r>
+              <a:rPr lang="en-US" dirty="0"/>
+              <a:t/>
+            </a:r>
+            <a:endParaRPr lang="en-US" dirty="0"/>
+          </a:p>
+        </p:txBody>
+      </p:sp>
+      <p:sp>
+        <p:nvSpPr>
+          <p:cNvPr id="4" name="Slide Number Placeholder 3"/>
+          <p:cNvSpPr>
+            <a:spLocks noGrp="1"/>
+          </p:cNvSpPr>
+          <p:nvPr>
+            <p:ph type="sldNum" sz="quarter" idx="10"/>
+          </p:nvPr>
+        </p:nvSpPr>
+        <p:spPr/>
+        <p:txBody>
+          <a:bodyPr/>
+          <a:lstStyle/>
+          <a:p>
+            <a:fld id="{F7021451-1387-4CA6-816F-3879F97B5CBC}" type="slidenum">
+              <a:rPr lang="en-US"/>
+              <a:t>8</a:t>
+            </a:fld>
+            <a:endParaRPr lang="en-US"/>
+          </a:p>
+        </p:txBody>
+      </p:sp>
+    </p:spTree>
+    <p:extLst>
+      <p:ext uri="{BB962C8B-B14F-4D97-AF65-F5344CB8AC3E}">
+        <p14:creationId xmlns:p14="http://schemas.microsoft.com/office/powerpoint/2010/main" val="1024086991"/>
+      </p:ext>
+    </p:extLst>
+  </p:cSld>
+  <p:clrMapOvr>
+    <a:masterClrMapping/>
+  </p:clrMapOvr>
+</p:notes>
+</file>
+
+<file path=ppt/notesSlides/notesSlide9.xml><?xml version="1.0" encoding="utf-8"?>
+<p:notes xmlns:a="http://schemas.openxmlformats.org/drawingml/2006/main" xmlns:r="http://schemas.openxmlformats.org/officeDocument/2006/relationships" xmlns:p="http://schemas.openxmlformats.org/presentationml/2006/main">
+  <p:cSld>
+    <p:spTree>
+      <p:nvGrpSpPr>
+        <p:cNvPr id="1" name=""/>
+        <p:cNvGrpSpPr/>
+        <p:nvPr/>
+      </p:nvGrpSpPr>
+      <p:grpSpPr>
+        <a:xfrm>
+          <a:off x="0" y="0"/>
+          <a:ext cx="0" cy="0"/>
+          <a:chOff x="0" y="0"/>
+          <a:chExt cx="0" cy="0"/>
+        </a:xfrm>
+      </p:grpSpPr>
+      <p:sp>
+        <p:nvSpPr>
+          <p:cNvPr id="2" name="Slide Image Placeholder 1"/>
+          <p:cNvSpPr>
+            <a:spLocks noGrp="1" noRot="1" noChangeAspect="1"/>
+          </p:cNvSpPr>
+          <p:nvPr>
+            <p:ph type="sldImg"/>
+          </p:nvPr>
+        </p:nvSpPr>
+        <p:spPr/>
+      </p:sp>
+      <p:sp>
+        <p:nvSpPr>
+          <p:cNvPr id="3" name="Notes Placeholder 2"/>
+          <p:cNvSpPr>
+            <a:spLocks noGrp="1"/>
+          </p:cNvSpPr>
+          <p:nvPr>
+            <p:ph type="body" idx="1"/>
+          </p:nvPr>
+        </p:nvSpPr>
+        <p:spPr/>
+        <p:txBody>
+          <a:bodyPr/>
+          <a:lstStyle/>
+          <a:p>
+            <a:r>
+              <a:rPr lang="en-US" dirty="0"/>
+              <a:t/>
+            </a:r>
+            <a:endParaRPr lang="en-US" dirty="0"/>
+          </a:p>
+        </p:txBody>
+      </p:sp>
+      <p:sp>
+        <p:nvSpPr>
+          <p:cNvPr id="4" name="Slide Number Placeholder 3"/>
+          <p:cNvSpPr>
+            <a:spLocks noGrp="1"/>
+          </p:cNvSpPr>
+          <p:nvPr>
+            <p:ph type="sldNum" sz="quarter" idx="10"/>
+          </p:nvPr>
+        </p:nvSpPr>
+        <p:spPr/>
+        <p:txBody>
+          <a:bodyPr/>
+          <a:lstStyle/>
+          <a:p>
+            <a:fld id="{F7021451-1387-4CA6-816F-3879F97B5CBC}" type="slidenum">
+              <a:rPr lang="en-US"/>
+              <a:t>9</a:t>
+            </a:fld>
+            <a:endParaRPr lang="en-US"/>
+          </a:p>
+        </p:txBody>
+      </p:sp>
+    </p:spTree>
+    <p:extLst>
+      <p:ext uri="{BB962C8B-B14F-4D97-AF65-F5344CB8AC3E}">
+        <p14:creationId xmlns:p14="http://schemas.microsoft.com/office/powerpoint/2010/main" val="1024086991"/>
+      </p:ext>
+    </p:extLst>
+  </p:cSld>
+  <p:clrMapOvr>
+    <a:masterClrMapping/>
+  </p:clrMapOvr>
+</p:notes>
+</file>
+
 <file path=ppt/slideLayouts/slideLayout1.xml><?xml version="1.0" encoding="utf-8"?>
 <p:sldLayout xmlns:a="http://schemas.openxmlformats.org/drawingml/2006/main" xmlns:r="http://schemas.openxmlformats.org/officeDocument/2006/relationships" xmlns:p="http://schemas.openxmlformats.org/presentationml/2006/main" preserve="1">
   <p:cSld name="DEFAULT">
@@ -1259,7 +1615,7 @@
             <a:avLst/>
           </a:prstGeom>
           <a:solidFill>
-            <a:srgbClr val="1B2A4A"/>
+            <a:srgbClr val="E9C46A"/>
           </a:solidFill>
           <a:ln/>
         </p:spPr>
@@ -1291,7 +1647,7 @@
             <a:r>
               <a:rPr lang="en-US" sz="1400" b="1" spc="400" kern="0" dirty="0">
                 <a:solidFill>
-                  <a:srgbClr val="1B2A4A"/>
+                  <a:srgbClr val="E9C46A"/>
                 </a:solidFill>
                 <a:latin typeface="Calibri" pitchFamily="34" charset="0"/>
                 <a:ea typeface="Calibri" pitchFamily="34" charset="-122"/>
@@ -1336,7 +1692,24 @@
                 <a:ea typeface="Georgia" pitchFamily="34" charset="-122"/>
                 <a:cs typeface="Georgia" pitchFamily="34" charset="-120"/>
               </a:rPr>
-              <a:t>Human Impact on Ecosystems</a:t>
+              <a:t>Human Impact</a:t>
+            </a:r>
+            <a:endParaRPr lang="en-US" sz="4000" dirty="0"/>
+          </a:p>
+          <a:p>
+            <a:pPr indent="0" marL="0">
+              <a:buNone/>
+            </a:pPr>
+            <a:r>
+              <a:rPr lang="en-US" sz="4000" b="1" dirty="0">
+                <a:solidFill>
+                  <a:srgbClr val="FFFFFF"/>
+                </a:solidFill>
+                <a:latin typeface="Georgia" pitchFamily="34" charset="0"/>
+                <a:ea typeface="Georgia" pitchFamily="34" charset="-122"/>
+                <a:cs typeface="Georgia" pitchFamily="34" charset="-120"/>
+              </a:rPr>
+              <a:t>on Ecosystems</a:t>
             </a:r>
             <a:endParaRPr lang="en-US" sz="4000" dirty="0"/>
           </a:p>
@@ -1367,7 +1740,7 @@
               <a:buNone/>
             </a:pPr>
             <a:r>
-              <a:rPr lang="en-US" sz="1600" dirty="0">
+              <a:rPr lang="en-US" sz="1600" i="1" dirty="0">
                 <a:solidFill>
                   <a:srgbClr val="9B9690"/>
                 </a:solidFill>
@@ -1375,7 +1748,7 @@
                 <a:ea typeface="Calibri" pitchFamily="34" charset="-122"/>
                 <a:cs typeface="Calibri" pitchFamily="34" charset="-120"/>
               </a:rPr>
-              <a:t>How our actions affect the natural world</a:t>
+              <a:t>How we change the natural world</a:t>
             </a:r>
             <a:endParaRPr lang="en-US" sz="1600" dirty="0"/>
           </a:p>
@@ -1406,7 +1779,7 @@
               <a:buNone/>
             </a:pPr>
             <a:r>
-              <a:rPr lang="en-US" sz="1100" dirty="0">
+              <a:rPr lang="en-US" sz="1200" dirty="0">
                 <a:solidFill>
                   <a:srgbClr val="6B6660"/>
                 </a:solidFill>
@@ -1414,9 +1787,9 @@
                 <a:ea typeface="Calibri" pitchFamily="34" charset="-122"/>
                 <a:cs typeface="Calibri" pitchFamily="34" charset="-120"/>
               </a:rPr>
-              <a:t>Mr Zocchi · NIS</a:t>
-            </a:r>
-            <a:endParaRPr lang="en-US" sz="1100" dirty="0"/>
+              <a:t>Mr Zocchi</a:t>
+            </a:r>
+            <a:endParaRPr lang="en-US" sz="1200" dirty="0"/>
           </a:p>
         </p:txBody>
       </p:sp>
@@ -1460,41 +1833,21 @@
             <a:avLst/>
           </a:prstGeom>
           <a:solidFill>
-            <a:srgbClr val="FAF8F5"/>
-          </a:solidFill>
-          <a:ln/>
-        </p:spPr>
-      </p:sp>
-      <p:sp>
-        <p:nvSpPr>
-          <p:cNvPr id="3" name="Shape 1"/>
-          <p:cNvSpPr/>
-          <p:nvPr/>
-        </p:nvSpPr>
-        <p:spPr>
-          <a:xfrm>
-            <a:off x="0" y="0"/>
-            <a:ext cx="9144000" cy="54864"/>
-          </a:xfrm>
-          <a:prstGeom prst="rect">
-            <a:avLst/>
-          </a:prstGeom>
-          <a:solidFill>
-            <a:srgbClr val="1B2A4A"/>
-          </a:solidFill>
-          <a:ln/>
-        </p:spPr>
-      </p:sp>
-      <p:sp>
-        <p:nvSpPr>
-          <p:cNvPr id="4" name="Text 2"/>
-          <p:cNvSpPr/>
-          <p:nvPr/>
-        </p:nvSpPr>
-        <p:spPr>
-          <a:xfrm>
-            <a:off x="640080" y="320040"/>
-            <a:ext cx="7863840" cy="640080"/>
+            <a:srgbClr val="111D35"/>
+          </a:solidFill>
+          <a:ln/>
+        </p:spPr>
+      </p:sp>
+      <p:sp>
+        <p:nvSpPr>
+          <p:cNvPr id="3" name="Text 1"/>
+          <p:cNvSpPr/>
+          <p:nvPr/>
+        </p:nvSpPr>
+        <p:spPr>
+          <a:xfrm>
+            <a:off x="6858000" y="182880"/>
+            <a:ext cx="2286000" cy="2743200"/>
           </a:xfrm>
           <a:prstGeom prst="rect">
             <a:avLst/>
@@ -1503,24 +1856,65 @@
           <a:ln/>
         </p:spPr>
         <p:txBody>
-          <a:bodyPr wrap="square" lIns="0" tIns="0" rIns="0" bIns="0" rtlCol="0" anchor="ctr"/>
-          <a:lstStyle/>
-          <a:p>
-            <a:pPr indent="0" marL="0">
+          <a:bodyPr wrap="square" rtlCol="0" anchor="ctr"/>
+          <a:lstStyle/>
+          <a:p>
+            <a:pPr algn="ctr" indent="0" marL="0">
               <a:buNone/>
             </a:pPr>
             <a:r>
-              <a:rPr lang="en-US" sz="2600" b="1" dirty="0">
-                <a:solidFill>
-                  <a:srgbClr val="1B2A4A"/>
+              <a:rPr lang="en-US" sz="16000" b="1" dirty="0">
+                <a:solidFill>
+                  <a:srgbClr val="E9C46A">
+                    <a:alpha val="80000"/>
+                  </a:srgbClr>
                 </a:solidFill>
                 <a:latin typeface="Georgia" pitchFamily="34" charset="0"/>
                 <a:ea typeface="Georgia" pitchFamily="34" charset="-122"/>
                 <a:cs typeface="Georgia" pitchFamily="34" charset="-120"/>
               </a:rPr>
-              <a:t>Trophic Cascades</a:t>
-            </a:r>
-            <a:endParaRPr lang="en-US" sz="2600" dirty="0"/>
+              <a:t>?</a:t>
+            </a:r>
+            <a:endParaRPr lang="en-US" sz="16000" dirty="0"/>
+          </a:p>
+        </p:txBody>
+      </p:sp>
+      <p:sp>
+        <p:nvSpPr>
+          <p:cNvPr id="4" name="Text 2"/>
+          <p:cNvSpPr/>
+          <p:nvPr/>
+        </p:nvSpPr>
+        <p:spPr>
+          <a:xfrm>
+            <a:off x="731520" y="548640"/>
+            <a:ext cx="2743200" cy="365760"/>
+          </a:xfrm>
+          <a:prstGeom prst="rect">
+            <a:avLst/>
+          </a:prstGeom>
+          <a:noFill/>
+          <a:ln/>
+        </p:spPr>
+        <p:txBody>
+          <a:bodyPr wrap="square" rtlCol="0" anchor="ctr"/>
+          <a:lstStyle/>
+          <a:p>
+            <a:pPr indent="0" marL="0">
+              <a:buNone/>
+            </a:pPr>
+            <a:r>
+              <a:rPr lang="en-US" sz="1200" b="1" spc="400" kern="0" dirty="0">
+                <a:solidFill>
+                  <a:srgbClr val="E9C46A"/>
+                </a:solidFill>
+                <a:latin typeface="Calibri" pitchFamily="34" charset="0"/>
+                <a:ea typeface="Calibri" pitchFamily="34" charset="-122"/>
+                <a:cs typeface="Calibri" pitchFamily="34" charset="-120"/>
+              </a:rPr>
+              <a:t>INQUIRY</a:t>
+            </a:r>
+            <a:endParaRPr lang="en-US" sz="1200" dirty="0"/>
           </a:p>
         </p:txBody>
       </p:sp>
@@ -1532,8 +1926,8 @@
         </p:nvSpPr>
         <p:spPr>
           <a:xfrm>
-            <a:off x="640080" y="1188720"/>
-            <a:ext cx="7863840" cy="3200400"/>
+            <a:off x="731520" y="1005840"/>
+            <a:ext cx="6858000" cy="1463040"/>
           </a:xfrm>
           <a:prstGeom prst="rect">
             <a:avLst/>
@@ -1545,109 +1939,204 @@
           <a:bodyPr wrap="square" rtlCol="0" anchor="t"/>
           <a:lstStyle/>
           <a:p>
+            <a:pPr indent="0" marL="0">
+              <a:buNone/>
+            </a:pPr>
+            <a:r>
+              <a:rPr lang="en-US" sz="2800" b="1" dirty="0">
+                <a:solidFill>
+                  <a:srgbClr val="FFFFFF"/>
+                </a:solidFill>
+                <a:latin typeface="Georgia" pitchFamily="34" charset="0"/>
+                <a:ea typeface="Georgia" pitchFamily="34" charset="-122"/>
+                <a:cs typeface="Georgia" pitchFamily="34" charset="-120"/>
+              </a:rPr>
+              <a:t>Nanjing's air quality has improved dramatically since 2015. What changed — and was it enough?</a:t>
+            </a:r>
+            <a:endParaRPr lang="en-US" sz="2800" dirty="0"/>
+          </a:p>
+        </p:txBody>
+      </p:sp>
+      <p:sp>
+        <p:nvSpPr>
+          <p:cNvPr id="6" name="Text 4"/>
+          <p:cNvSpPr/>
+          <p:nvPr/>
+        </p:nvSpPr>
+        <p:spPr>
+          <a:xfrm>
+            <a:off x="731520" y="2560320"/>
+            <a:ext cx="6858000" cy="548640"/>
+          </a:xfrm>
+          <a:prstGeom prst="rect">
+            <a:avLst/>
+          </a:prstGeom>
+          <a:noFill/>
+          <a:ln/>
+        </p:spPr>
+        <p:txBody>
+          <a:bodyPr wrap="square" rtlCol="0" anchor="ctr"/>
+          <a:lstStyle/>
+          <a:p>
+            <a:pPr indent="0" marL="0">
+              <a:buNone/>
+            </a:pPr>
+            <a:r>
+              <a:rPr lang="en-US" sz="1400" i="1" dirty="0">
+                <a:solidFill>
+                  <a:srgbClr val="9B9690"/>
+                </a:solidFill>
+                <a:latin typeface="Calibri" pitchFamily="34" charset="0"/>
+                <a:ea typeface="Calibri" pitchFamily="34" charset="-122"/>
+                <a:cs typeface="Calibri" pitchFamily="34" charset="-120"/>
+              </a:rPr>
+              <a:t>China invested billions in air pollution controls. But ecosystems are still under pressure.</a:t>
+            </a:r>
+            <a:endParaRPr lang="en-US" sz="1400" dirty="0"/>
+          </a:p>
+        </p:txBody>
+      </p:sp>
+      <p:sp>
+        <p:nvSpPr>
+          <p:cNvPr id="7" name="Shape 5"/>
+          <p:cNvSpPr/>
+          <p:nvPr/>
+        </p:nvSpPr>
+        <p:spPr>
+          <a:xfrm>
+            <a:off x="548640" y="3200400"/>
+            <a:ext cx="7315200" cy="1645920"/>
+          </a:xfrm>
+          <a:prstGeom prst="rect">
+            <a:avLst/>
+          </a:prstGeom>
+          <a:solidFill>
+            <a:srgbClr val="243660"/>
+          </a:solidFill>
+          <a:ln/>
+        </p:spPr>
+      </p:sp>
+      <p:sp>
+        <p:nvSpPr>
+          <p:cNvPr id="8" name="Text 6"/>
+          <p:cNvSpPr/>
+          <p:nvPr/>
+        </p:nvSpPr>
+        <p:spPr>
+          <a:xfrm>
+            <a:off x="731520" y="3246120"/>
+            <a:ext cx="3657600" cy="320040"/>
+          </a:xfrm>
+          <a:prstGeom prst="rect">
+            <a:avLst/>
+          </a:prstGeom>
+          <a:noFill/>
+          <a:ln/>
+        </p:spPr>
+        <p:txBody>
+          <a:bodyPr wrap="square" rtlCol="0" anchor="ctr"/>
+          <a:lstStyle/>
+          <a:p>
+            <a:pPr indent="0" marL="0">
+              <a:buNone/>
+            </a:pPr>
+            <a:r>
+              <a:rPr lang="en-US" sz="1100" b="1" spc="200" kern="0" dirty="0">
+                <a:solidFill>
+                  <a:srgbClr val="E9C46A"/>
+                </a:solidFill>
+                <a:latin typeface="Calibri" pitchFamily="34" charset="0"/>
+                <a:ea typeface="Calibri" pitchFamily="34" charset="-122"/>
+                <a:cs typeface="Calibri" pitchFamily="34" charset="-120"/>
+              </a:rPr>
+              <a:t>Think — Pair — Share</a:t>
+            </a:r>
+            <a:endParaRPr lang="en-US" sz="1100" dirty="0"/>
+          </a:p>
+        </p:txBody>
+      </p:sp>
+      <p:sp>
+        <p:nvSpPr>
+          <p:cNvPr id="9" name="Text 7"/>
+          <p:cNvSpPr/>
+          <p:nvPr/>
+        </p:nvSpPr>
+        <p:spPr>
+          <a:xfrm>
+            <a:off x="731520" y="3566160"/>
+            <a:ext cx="6949440" cy="1188720"/>
+          </a:xfrm>
+          <a:prstGeom prst="rect">
+            <a:avLst/>
+          </a:prstGeom>
+          <a:noFill/>
+          <a:ln/>
+        </p:spPr>
+        <p:txBody>
+          <a:bodyPr wrap="square" rtlCol="0" anchor="ctr"/>
+          <a:lstStyle/>
+          <a:p>
             <a:pPr marL="342900" indent="-342900">
-              <a:lnSpc>
-                <a:spcPct val="140000"/>
-              </a:lnSpc>
+              <a:spcAft>
+                <a:spcPts val="600"/>
+              </a:spcAft>
               <a:buSzPct val="100000"/>
               <a:buChar char="•"/>
             </a:pPr>
             <a:r>
-              <a:rPr lang="en-US" sz="1500" dirty="0">
-                <a:solidFill>
-                  <a:srgbClr val="3D3A36"/>
-                </a:solidFill>
-                <a:latin typeface="Calibri" pitchFamily="34" charset="0"/>
-                <a:ea typeface="Calibri" pitchFamily="34" charset="-122"/>
-                <a:cs typeface="Calibri" pitchFamily="34" charset="-120"/>
-              </a:rPr>
-              <a:t>When humans remove or add species, effects cascade through the food web.</a:t>
-            </a:r>
-            <a:endParaRPr lang="en-US" sz="1500" dirty="0"/>
+              <a:rPr lang="en-US" sz="1400" dirty="0">
+                <a:solidFill>
+                  <a:srgbClr val="E5E2DC"/>
+                </a:solidFill>
+                <a:latin typeface="Calibri" pitchFamily="34" charset="0"/>
+                <a:ea typeface="Calibri" pitchFamily="34" charset="-122"/>
+                <a:cs typeface="Calibri" pitchFamily="34" charset="-120"/>
+              </a:rPr>
+              <a:t>What human activities damage ecosystems?</a:t>
+            </a:r>
+            <a:endParaRPr lang="en-US" sz="1400" dirty="0"/>
           </a:p>
           <a:p>
             <a:pPr marL="342900" indent="-342900">
-              <a:lnSpc>
-                <a:spcPct val="140000"/>
-              </a:lnSpc>
+              <a:spcAft>
+                <a:spcPts val="600"/>
+              </a:spcAft>
               <a:buSzPct val="100000"/>
               <a:buChar char="•"/>
             </a:pPr>
             <a:r>
-              <a:rPr lang="en-US" sz="1500" dirty="0">
-                <a:solidFill>
-                  <a:srgbClr val="3D3A36"/>
-                </a:solidFill>
-                <a:latin typeface="Calibri" pitchFamily="34" charset="0"/>
-                <a:ea typeface="Calibri" pitchFamily="34" charset="-122"/>
-                <a:cs typeface="Calibri" pitchFamily="34" charset="-120"/>
-              </a:rPr>
-              <a:t>This is called a trophic cascade.</a:t>
-            </a:r>
-            <a:endParaRPr lang="en-US" sz="1500" dirty="0"/>
+              <a:rPr lang="en-US" sz="1400" dirty="0">
+                <a:solidFill>
+                  <a:srgbClr val="E5E2DC"/>
+                </a:solidFill>
+                <a:latin typeface="Calibri" pitchFamily="34" charset="0"/>
+                <a:ea typeface="Calibri" pitchFamily="34" charset="-122"/>
+                <a:cs typeface="Calibri" pitchFamily="34" charset="-120"/>
+              </a:rPr>
+              <a:t>Can damage be reversed? How long does it take?</a:t>
+            </a:r>
+            <a:endParaRPr lang="en-US" sz="1400" dirty="0"/>
           </a:p>
           <a:p>
             <a:pPr marL="342900" indent="-342900">
-              <a:lnSpc>
-                <a:spcPct val="140000"/>
-              </a:lnSpc>
+              <a:spcAft>
+                <a:spcPts val="600"/>
+              </a:spcAft>
               <a:buSzPct val="100000"/>
               <a:buChar char="•"/>
             </a:pPr>
             <a:r>
-              <a:rPr lang="en-US" sz="1500" dirty="0">
-                <a:solidFill>
-                  <a:srgbClr val="3D3A36"/>
-                </a:solidFill>
-                <a:latin typeface="Calibri" pitchFamily="34" charset="0"/>
-                <a:ea typeface="Calibri" pitchFamily="34" charset="-122"/>
-                <a:cs typeface="Calibri" pitchFamily="34" charset="-120"/>
-              </a:rPr>
-              <a:t>Example: Wolves removed from Yellowstone (1920s) →</a:t>
-            </a:r>
-            <a:endParaRPr lang="en-US" sz="1500" dirty="0"/>
-          </a:p>
-          <a:p>
-            <a:pPr marL="342900" indent="-342900">
-              <a:lnSpc>
-                <a:spcPct val="140000"/>
-              </a:lnSpc>
-              <a:buSzPct val="100000"/>
-              <a:buChar char="•"/>
-            </a:pPr>
-            <a:r>
-              <a:rPr lang="en-US" sz="1500" dirty="0">
-                <a:solidFill>
-                  <a:srgbClr val="3D3A36"/>
-                </a:solidFill>
-                <a:latin typeface="Calibri" pitchFamily="34" charset="0"/>
-                <a:ea typeface="Calibri" pitchFamily="34" charset="-122"/>
-                <a:cs typeface="Calibri" pitchFamily="34" charset="-120"/>
-              </a:rPr>
-              <a:t>Elk exploded → overgrazed vegetation → erosion → habitat loss.</a:t>
-            </a:r>
-            <a:endParaRPr lang="en-US" sz="1500" dirty="0"/>
-          </a:p>
-          <a:p>
-            <a:pPr marL="342900" indent="-342900">
-              <a:lnSpc>
-                <a:spcPct val="140000"/>
-              </a:lnSpc>
-              <a:buSzPct val="100000"/>
-              <a:buChar char="•"/>
-            </a:pPr>
-            <a:r>
-              <a:rPr lang="en-US" sz="1500" dirty="0">
-                <a:solidFill>
-                  <a:srgbClr val="3D3A36"/>
-                </a:solidFill>
-                <a:latin typeface="Calibri" pitchFamily="34" charset="0"/>
-                <a:ea typeface="Calibri" pitchFamily="34" charset="-122"/>
-                <a:cs typeface="Calibri" pitchFamily="34" charset="-120"/>
-              </a:rPr>
-              <a:t>Wolves reintroduced (1995) → elk decreased → vegetation recovered → rivers stabilised.</a:t>
-            </a:r>
-            <a:endParaRPr lang="en-US" sz="1500" dirty="0"/>
+              <a:rPr lang="en-US" sz="1400" dirty="0">
+                <a:solidFill>
+                  <a:srgbClr val="E5E2DC"/>
+                </a:solidFill>
+                <a:latin typeface="Calibri" pitchFamily="34" charset="0"/>
+                <a:ea typeface="Calibri" pitchFamily="34" charset="-122"/>
+                <a:cs typeface="Calibri" pitchFamily="34" charset="-120"/>
+              </a:rPr>
+              <a:t>What is YOUR school or city doing about it?</a:t>
+            </a:r>
+            <a:endParaRPr lang="en-US" sz="1400" dirty="0"/>
           </a:p>
         </p:txBody>
       </p:sp>
@@ -1662,6 +2151,13 @@
 <file path=ppt/slides/slide3.xml><?xml version="1.0" encoding="utf-8"?>
 <p:sld xmlns:a="http://schemas.openxmlformats.org/drawingml/2006/main" xmlns:r="http://schemas.openxmlformats.org/officeDocument/2006/relationships" xmlns:p="http://schemas.openxmlformats.org/presentationml/2006/main">
   <p:cSld name="Slide 3">
+    <p:bg>
+      <p:bgPr>
+        <a:solidFill>
+          <a:srgbClr val="FAF8F5"/>
+        </a:solidFill>
+      </p:bgPr>
+    </p:bg>
     <p:spTree>
       <p:nvGrpSpPr>
         <p:cNvPr id="1" name=""/>
@@ -1685,13 +2181,13 @@
         <p:spPr>
           <a:xfrm>
             <a:off x="0" y="0"/>
-            <a:ext cx="9144000" cy="5143500"/>
-          </a:xfrm>
-          <a:prstGeom prst="rect">
-            <a:avLst/>
-          </a:prstGeom>
-          <a:solidFill>
-            <a:srgbClr val="FAF8F5"/>
+            <a:ext cx="9144000" cy="822960"/>
+          </a:xfrm>
+          <a:prstGeom prst="rect">
+            <a:avLst/>
+          </a:prstGeom>
+          <a:solidFill>
+            <a:srgbClr val="FFFFFF"/>
           </a:solidFill>
           <a:ln/>
         </p:spPr>
@@ -1704,14 +2200,14 @@
         </p:nvSpPr>
         <p:spPr>
           <a:xfrm>
-            <a:off x="0" y="0"/>
-            <a:ext cx="9144000" cy="54864"/>
-          </a:xfrm>
-          <a:prstGeom prst="rect">
-            <a:avLst/>
-          </a:prstGeom>
-          <a:solidFill>
-            <a:srgbClr val="1B2A4A"/>
+            <a:off x="0" y="795528"/>
+            <a:ext cx="9144000" cy="27432"/>
+          </a:xfrm>
+          <a:prstGeom prst="rect">
+            <a:avLst/>
+          </a:prstGeom>
+          <a:solidFill>
+            <a:srgbClr val="E9C46A"/>
           </a:solidFill>
           <a:ln/>
         </p:spPr>
@@ -1724,8 +2220,8 @@
         </p:nvSpPr>
         <p:spPr>
           <a:xfrm>
-            <a:off x="640080" y="320040"/>
-            <a:ext cx="7863840" cy="548640"/>
+            <a:off x="640080" y="91440"/>
+            <a:ext cx="7863840" cy="640080"/>
           </a:xfrm>
           <a:prstGeom prst="rect">
             <a:avLst/>
@@ -1741,7 +2237,7 @@
               <a:buNone/>
             </a:pPr>
             <a:r>
-              <a:rPr lang="en-US" sz="2600" b="1" dirty="0">
+              <a:rPr lang="en-US" sz="2200" b="1" dirty="0">
                 <a:solidFill>
                   <a:srgbClr val="1B2A4A"/>
                 </a:solidFill>
@@ -1749,840 +2245,139 @@
                 <a:ea typeface="Georgia" pitchFamily="34" charset="-122"/>
                 <a:cs typeface="Georgia" pitchFamily="34" charset="-120"/>
               </a:rPr>
-              <a:t>Human Threats</a:t>
-            </a:r>
-            <a:endParaRPr lang="en-US" sz="2600" dirty="0"/>
-          </a:p>
-        </p:txBody>
-      </p:sp>
-      <p:graphicFrame>
-        <p:nvGraphicFramePr>
-          <p:cNvPr id="4" name="Table 0"/>
-          <p:cNvGraphicFramePr>
-            <a:graphicFrameLocks noGrp="1"/>
-          </p:cNvGraphicFramePr>
-          <p:nvPr>
-            <p:extLst>
-              <p:ext uri="{D42A27DB-BD31-4B8C-83A1-F6EECF244321}">
-                <p14:modId xmlns:p14="http://schemas.microsoft.com/office/powerpoint/2010/main" val="1579011935"/>
-              </p:ext>
-            </p:extLst>
-          </p:nvPr>
-        </p:nvGraphicFramePr>
-        <p:xfrm>
-          <a:off x="640080" y="1051560"/>
-          <a:ext cx="7863840" cy="914400"/>
-        </p:xfrm>
-        <a:graphic>
-          <a:graphicData uri="http://schemas.openxmlformats.org/drawingml/2006/table">
-            <a:tbl>
-              <a:tblPr/>
-              <a:tblGrid>
-                <a:gridCol w="2560320"/>
-                <a:gridCol w="5303520"/>
-              </a:tblGrid>
-              <a:tr h="594360">
-                <a:tc>
-                  <a:txBody>
-                    <a:bodyPr/>
-                    <a:lstStyle/>
-                    <a:p>
-                      <a:pPr indent="0" marL="0">
-                        <a:buNone/>
-                      </a:pPr>
-                      <a:r>
-                        <a:rPr lang="en-US" sz="1300" b="1" dirty="0">
-                          <a:solidFill>
-                            <a:srgbClr val="FFFFFF"/>
-                          </a:solidFill>
-                          <a:latin typeface="Calibri" pitchFamily="34" charset="0"/>
-                          <a:ea typeface="Calibri" pitchFamily="34" charset="-122"/>
-                          <a:cs typeface="Calibri" pitchFamily="34" charset="-120"/>
-                        </a:rPr>
-                        <a:t>Term</a:t>
-                      </a:r>
-                      <a:endParaRPr lang="en-US" sz="1300" dirty="0">
-                        <a:latin typeface="Calibri" charset="0"/>
-                        <a:ea typeface="Calibri" charset="0"/>
-                        <a:cs typeface="Calibri" charset="0"/>
-                      </a:endParaRPr>
-                    </a:p>
-                  </a:txBody>
-                  <a:tcPr marL="91440" marR="91440" marT="45720" marB="45720">
-                    <a:lnL w="6350" cap="flat" cmpd="sng" algn="ctr">
-                      <a:solidFill>
-                        <a:srgbClr val="E5E2DC"/>
-                      </a:solidFill>
-                      <a:prstDash val="solid"/>
-                      <a:round/>
-                      <a:headEnd type="none" w="med" len="med"/>
-                      <a:tailEnd type="none" w="med" len="med"/>
-                    </a:lnL>
-                    <a:lnR w="6350" cap="flat" cmpd="sng" algn="ctr">
-                      <a:solidFill>
-                        <a:srgbClr val="E5E2DC"/>
-                      </a:solidFill>
-                      <a:prstDash val="solid"/>
-                      <a:round/>
-                      <a:headEnd type="none" w="med" len="med"/>
-                      <a:tailEnd type="none" w="med" len="med"/>
-                    </a:lnR>
-                    <a:lnT w="6350" cap="flat" cmpd="sng" algn="ctr">
-                      <a:solidFill>
-                        <a:srgbClr val="E5E2DC"/>
-                      </a:solidFill>
-                      <a:prstDash val="solid"/>
-                      <a:round/>
-                      <a:headEnd type="none" w="med" len="med"/>
-                      <a:tailEnd type="none" w="med" len="med"/>
-                    </a:lnT>
-                    <a:lnB w="6350" cap="flat" cmpd="sng" algn="ctr">
-                      <a:solidFill>
-                        <a:srgbClr val="E5E2DC"/>
-                      </a:solidFill>
-                      <a:prstDash val="solid"/>
-                      <a:round/>
-                      <a:headEnd type="none" w="med" len="med"/>
-                      <a:tailEnd type="none" w="med" len="med"/>
-                    </a:lnB>
-                    <a:solidFill>
-                      <a:srgbClr val="1B2A4A"/>
-                    </a:solidFill>
-                  </a:tcPr>
-                </a:tc>
-                <a:tc>
-                  <a:txBody>
-                    <a:bodyPr/>
-                    <a:lstStyle/>
-                    <a:p>
-                      <a:pPr indent="0" marL="0">
-                        <a:buNone/>
-                      </a:pPr>
-                      <a:r>
-                        <a:rPr lang="en-US" sz="1300" b="1" dirty="0">
-                          <a:solidFill>
-                            <a:srgbClr val="FFFFFF"/>
-                          </a:solidFill>
-                          <a:latin typeface="Calibri" pitchFamily="34" charset="0"/>
-                          <a:ea typeface="Calibri" pitchFamily="34" charset="-122"/>
-                          <a:cs typeface="Calibri" pitchFamily="34" charset="-120"/>
-                        </a:rPr>
-                        <a:t>Definition</a:t>
-                      </a:r>
-                      <a:endParaRPr lang="en-US" sz="1300" dirty="0">
-                        <a:latin typeface="Calibri" charset="0"/>
-                        <a:ea typeface="Calibri" charset="0"/>
-                        <a:cs typeface="Calibri" charset="0"/>
-                      </a:endParaRPr>
-                    </a:p>
-                  </a:txBody>
-                  <a:tcPr marL="91440" marR="91440" marT="45720" marB="45720">
-                    <a:lnL w="6350" cap="flat" cmpd="sng" algn="ctr">
-                      <a:solidFill>
-                        <a:srgbClr val="E5E2DC"/>
-                      </a:solidFill>
-                      <a:prstDash val="solid"/>
-                      <a:round/>
-                      <a:headEnd type="none" w="med" len="med"/>
-                      <a:tailEnd type="none" w="med" len="med"/>
-                    </a:lnL>
-                    <a:lnR w="6350" cap="flat" cmpd="sng" algn="ctr">
-                      <a:solidFill>
-                        <a:srgbClr val="E5E2DC"/>
-                      </a:solidFill>
-                      <a:prstDash val="solid"/>
-                      <a:round/>
-                      <a:headEnd type="none" w="med" len="med"/>
-                      <a:tailEnd type="none" w="med" len="med"/>
-                    </a:lnR>
-                    <a:lnT w="6350" cap="flat" cmpd="sng" algn="ctr">
-                      <a:solidFill>
-                        <a:srgbClr val="E5E2DC"/>
-                      </a:solidFill>
-                      <a:prstDash val="solid"/>
-                      <a:round/>
-                      <a:headEnd type="none" w="med" len="med"/>
-                      <a:tailEnd type="none" w="med" len="med"/>
-                    </a:lnT>
-                    <a:lnB w="6350" cap="flat" cmpd="sng" algn="ctr">
-                      <a:solidFill>
-                        <a:srgbClr val="E5E2DC"/>
-                      </a:solidFill>
-                      <a:prstDash val="solid"/>
-                      <a:round/>
-                      <a:headEnd type="none" w="med" len="med"/>
-                      <a:tailEnd type="none" w="med" len="med"/>
-                    </a:lnB>
-                    <a:solidFill>
-                      <a:srgbClr val="1B2A4A"/>
-                    </a:solidFill>
-                  </a:tcPr>
-                </a:tc>
-              </a:tr>
-              <a:tr h="594360">
-                <a:tc>
-                  <a:txBody>
-                    <a:bodyPr/>
-                    <a:lstStyle/>
-                    <a:p>
-                      <a:pPr indent="0" marL="0">
-                        <a:buNone/>
-                      </a:pPr>
-                      <a:r>
-                        <a:rPr lang="en-US" sz="1300" b="1" dirty="0">
-                          <a:solidFill>
-                            <a:srgbClr val="1B2A4A"/>
-                          </a:solidFill>
-                          <a:latin typeface="Calibri" pitchFamily="34" charset="0"/>
-                          <a:ea typeface="Calibri" pitchFamily="34" charset="-122"/>
-                          <a:cs typeface="Calibri" pitchFamily="34" charset="-120"/>
-                        </a:rPr>
-                        <a:t>Deforestation</a:t>
-                      </a:r>
-                      <a:endParaRPr lang="en-US" sz="1300" dirty="0">
-                        <a:latin typeface="Calibri" charset="0"/>
-                        <a:ea typeface="Calibri" charset="0"/>
-                        <a:cs typeface="Calibri" charset="0"/>
-                      </a:endParaRPr>
-                    </a:p>
-                  </a:txBody>
-                  <a:tcPr marL="91440" marR="91440" marT="45720" marB="45720">
-                    <a:lnL w="6350" cap="flat" cmpd="sng" algn="ctr">
-                      <a:solidFill>
-                        <a:srgbClr val="E5E2DC"/>
-                      </a:solidFill>
-                      <a:prstDash val="solid"/>
-                      <a:round/>
-                      <a:headEnd type="none" w="med" len="med"/>
-                      <a:tailEnd type="none" w="med" len="med"/>
-                    </a:lnL>
-                    <a:lnR w="6350" cap="flat" cmpd="sng" algn="ctr">
-                      <a:solidFill>
-                        <a:srgbClr val="E5E2DC"/>
-                      </a:solidFill>
-                      <a:prstDash val="solid"/>
-                      <a:round/>
-                      <a:headEnd type="none" w="med" len="med"/>
-                      <a:tailEnd type="none" w="med" len="med"/>
-                    </a:lnR>
-                    <a:lnT w="6350" cap="flat" cmpd="sng" algn="ctr">
-                      <a:solidFill>
-                        <a:srgbClr val="E5E2DC"/>
-                      </a:solidFill>
-                      <a:prstDash val="solid"/>
-                      <a:round/>
-                      <a:headEnd type="none" w="med" len="med"/>
-                      <a:tailEnd type="none" w="med" len="med"/>
-                    </a:lnT>
-                    <a:lnB w="6350" cap="flat" cmpd="sng" algn="ctr">
-                      <a:solidFill>
-                        <a:srgbClr val="E5E2DC"/>
-                      </a:solidFill>
-                      <a:prstDash val="solid"/>
-                      <a:round/>
-                      <a:headEnd type="none" w="med" len="med"/>
-                      <a:tailEnd type="none" w="med" len="med"/>
-                    </a:lnB>
-                  </a:tcPr>
-                </a:tc>
-                <a:tc>
-                  <a:txBody>
-                    <a:bodyPr/>
-                    <a:lstStyle/>
-                    <a:p>
-                      <a:pPr indent="0" marL="0">
-                        <a:buNone/>
-                      </a:pPr>
-                      <a:r>
-                        <a:rPr lang="en-US" sz="1300" dirty="0">
-                          <a:solidFill>
-                            <a:srgbClr val="3D3A36"/>
-                          </a:solidFill>
-                          <a:latin typeface="Calibri" pitchFamily="34" charset="0"/>
-                          <a:ea typeface="Calibri" pitchFamily="34" charset="-122"/>
-                          <a:cs typeface="Calibri" pitchFamily="34" charset="-120"/>
-                        </a:rPr>
-                        <a:t>Cutting forests; destroys habitats, reduces biodiversity</a:t>
-                      </a:r>
-                      <a:endParaRPr lang="en-US" sz="1300" dirty="0">
-                        <a:latin typeface="Calibri" charset="0"/>
-                        <a:ea typeface="Calibri" charset="0"/>
-                        <a:cs typeface="Calibri" charset="0"/>
-                      </a:endParaRPr>
-                    </a:p>
-                  </a:txBody>
-                  <a:tcPr marL="91440" marR="91440" marT="45720" marB="45720">
-                    <a:lnL w="6350" cap="flat" cmpd="sng" algn="ctr">
-                      <a:solidFill>
-                        <a:srgbClr val="E5E2DC"/>
-                      </a:solidFill>
-                      <a:prstDash val="solid"/>
-                      <a:round/>
-                      <a:headEnd type="none" w="med" len="med"/>
-                      <a:tailEnd type="none" w="med" len="med"/>
-                    </a:lnL>
-                    <a:lnR w="6350" cap="flat" cmpd="sng" algn="ctr">
-                      <a:solidFill>
-                        <a:srgbClr val="E5E2DC"/>
-                      </a:solidFill>
-                      <a:prstDash val="solid"/>
-                      <a:round/>
-                      <a:headEnd type="none" w="med" len="med"/>
-                      <a:tailEnd type="none" w="med" len="med"/>
-                    </a:lnR>
-                    <a:lnT w="6350" cap="flat" cmpd="sng" algn="ctr">
-                      <a:solidFill>
-                        <a:srgbClr val="E5E2DC"/>
-                      </a:solidFill>
-                      <a:prstDash val="solid"/>
-                      <a:round/>
-                      <a:headEnd type="none" w="med" len="med"/>
-                      <a:tailEnd type="none" w="med" len="med"/>
-                    </a:lnT>
-                    <a:lnB w="6350" cap="flat" cmpd="sng" algn="ctr">
-                      <a:solidFill>
-                        <a:srgbClr val="E5E2DC"/>
-                      </a:solidFill>
-                      <a:prstDash val="solid"/>
-                      <a:round/>
-                      <a:headEnd type="none" w="med" len="med"/>
-                      <a:tailEnd type="none" w="med" len="med"/>
-                    </a:lnB>
-                  </a:tcPr>
-                </a:tc>
-              </a:tr>
-              <a:tr h="594360">
-                <a:tc>
-                  <a:txBody>
-                    <a:bodyPr/>
-                    <a:lstStyle/>
-                    <a:p>
-                      <a:pPr indent="0" marL="0">
-                        <a:buNone/>
-                      </a:pPr>
-                      <a:r>
-                        <a:rPr lang="en-US" sz="1300" b="1" dirty="0">
-                          <a:solidFill>
-                            <a:srgbClr val="1B2A4A"/>
-                          </a:solidFill>
-                          <a:latin typeface="Calibri" pitchFamily="34" charset="0"/>
-                          <a:ea typeface="Calibri" pitchFamily="34" charset="-122"/>
-                          <a:cs typeface="Calibri" pitchFamily="34" charset="-120"/>
-                        </a:rPr>
-                        <a:t>Pollution</a:t>
-                      </a:r>
-                      <a:endParaRPr lang="en-US" sz="1300" dirty="0">
-                        <a:latin typeface="Calibri" charset="0"/>
-                        <a:ea typeface="Calibri" charset="0"/>
-                        <a:cs typeface="Calibri" charset="0"/>
-                      </a:endParaRPr>
-                    </a:p>
-                  </a:txBody>
-                  <a:tcPr marL="91440" marR="91440" marT="45720" marB="45720">
-                    <a:lnL w="6350" cap="flat" cmpd="sng" algn="ctr">
-                      <a:solidFill>
-                        <a:srgbClr val="E5E2DC"/>
-                      </a:solidFill>
-                      <a:prstDash val="solid"/>
-                      <a:round/>
-                      <a:headEnd type="none" w="med" len="med"/>
-                      <a:tailEnd type="none" w="med" len="med"/>
-                    </a:lnL>
-                    <a:lnR w="6350" cap="flat" cmpd="sng" algn="ctr">
-                      <a:solidFill>
-                        <a:srgbClr val="E5E2DC"/>
-                      </a:solidFill>
-                      <a:prstDash val="solid"/>
-                      <a:round/>
-                      <a:headEnd type="none" w="med" len="med"/>
-                      <a:tailEnd type="none" w="med" len="med"/>
-                    </a:lnR>
-                    <a:lnT w="6350" cap="flat" cmpd="sng" algn="ctr">
-                      <a:solidFill>
-                        <a:srgbClr val="E5E2DC"/>
-                      </a:solidFill>
-                      <a:prstDash val="solid"/>
-                      <a:round/>
-                      <a:headEnd type="none" w="med" len="med"/>
-                      <a:tailEnd type="none" w="med" len="med"/>
-                    </a:lnT>
-                    <a:lnB w="6350" cap="flat" cmpd="sng" algn="ctr">
-                      <a:solidFill>
-                        <a:srgbClr val="E5E2DC"/>
-                      </a:solidFill>
-                      <a:prstDash val="solid"/>
-                      <a:round/>
-                      <a:headEnd type="none" w="med" len="med"/>
-                      <a:tailEnd type="none" w="med" len="med"/>
-                    </a:lnB>
-                  </a:tcPr>
-                </a:tc>
-                <a:tc>
-                  <a:txBody>
-                    <a:bodyPr/>
-                    <a:lstStyle/>
-                    <a:p>
-                      <a:pPr indent="0" marL="0">
-                        <a:buNone/>
-                      </a:pPr>
-                      <a:r>
-                        <a:rPr lang="en-US" sz="1300" dirty="0">
-                          <a:solidFill>
-                            <a:srgbClr val="3D3A36"/>
-                          </a:solidFill>
-                          <a:latin typeface="Calibri" pitchFamily="34" charset="0"/>
-                          <a:ea typeface="Calibri" pitchFamily="34" charset="-122"/>
-                          <a:cs typeface="Calibri" pitchFamily="34" charset="-120"/>
-                        </a:rPr>
-                        <a:t>Contamination of air, water, or soil</a:t>
-                      </a:r>
-                      <a:endParaRPr lang="en-US" sz="1300" dirty="0">
-                        <a:latin typeface="Calibri" charset="0"/>
-                        <a:ea typeface="Calibri" charset="0"/>
-                        <a:cs typeface="Calibri" charset="0"/>
-                      </a:endParaRPr>
-                    </a:p>
-                  </a:txBody>
-                  <a:tcPr marL="91440" marR="91440" marT="45720" marB="45720">
-                    <a:lnL w="6350" cap="flat" cmpd="sng" algn="ctr">
-                      <a:solidFill>
-                        <a:srgbClr val="E5E2DC"/>
-                      </a:solidFill>
-                      <a:prstDash val="solid"/>
-                      <a:round/>
-                      <a:headEnd type="none" w="med" len="med"/>
-                      <a:tailEnd type="none" w="med" len="med"/>
-                    </a:lnL>
-                    <a:lnR w="6350" cap="flat" cmpd="sng" algn="ctr">
-                      <a:solidFill>
-                        <a:srgbClr val="E5E2DC"/>
-                      </a:solidFill>
-                      <a:prstDash val="solid"/>
-                      <a:round/>
-                      <a:headEnd type="none" w="med" len="med"/>
-                      <a:tailEnd type="none" w="med" len="med"/>
-                    </a:lnR>
-                    <a:lnT w="6350" cap="flat" cmpd="sng" algn="ctr">
-                      <a:solidFill>
-                        <a:srgbClr val="E5E2DC"/>
-                      </a:solidFill>
-                      <a:prstDash val="solid"/>
-                      <a:round/>
-                      <a:headEnd type="none" w="med" len="med"/>
-                      <a:tailEnd type="none" w="med" len="med"/>
-                    </a:lnT>
-                    <a:lnB w="6350" cap="flat" cmpd="sng" algn="ctr">
-                      <a:solidFill>
-                        <a:srgbClr val="E5E2DC"/>
-                      </a:solidFill>
-                      <a:prstDash val="solid"/>
-                      <a:round/>
-                      <a:headEnd type="none" w="med" len="med"/>
-                      <a:tailEnd type="none" w="med" len="med"/>
-                    </a:lnB>
-                  </a:tcPr>
-                </a:tc>
-              </a:tr>
-              <a:tr h="594360">
-                <a:tc>
-                  <a:txBody>
-                    <a:bodyPr/>
-                    <a:lstStyle/>
-                    <a:p>
-                      <a:pPr indent="0" marL="0">
-                        <a:buNone/>
-                      </a:pPr>
-                      <a:r>
-                        <a:rPr lang="en-US" sz="1300" b="1" dirty="0">
-                          <a:solidFill>
-                            <a:srgbClr val="1B2A4A"/>
-                          </a:solidFill>
-                          <a:latin typeface="Calibri" pitchFamily="34" charset="0"/>
-                          <a:ea typeface="Calibri" pitchFamily="34" charset="-122"/>
-                          <a:cs typeface="Calibri" pitchFamily="34" charset="-120"/>
-                        </a:rPr>
-                        <a:t>Overfishing</a:t>
-                      </a:r>
-                      <a:endParaRPr lang="en-US" sz="1300" dirty="0">
-                        <a:latin typeface="Calibri" charset="0"/>
-                        <a:ea typeface="Calibri" charset="0"/>
-                        <a:cs typeface="Calibri" charset="0"/>
-                      </a:endParaRPr>
-                    </a:p>
-                  </a:txBody>
-                  <a:tcPr marL="91440" marR="91440" marT="45720" marB="45720">
-                    <a:lnL w="6350" cap="flat" cmpd="sng" algn="ctr">
-                      <a:solidFill>
-                        <a:srgbClr val="E5E2DC"/>
-                      </a:solidFill>
-                      <a:prstDash val="solid"/>
-                      <a:round/>
-                      <a:headEnd type="none" w="med" len="med"/>
-                      <a:tailEnd type="none" w="med" len="med"/>
-                    </a:lnL>
-                    <a:lnR w="6350" cap="flat" cmpd="sng" algn="ctr">
-                      <a:solidFill>
-                        <a:srgbClr val="E5E2DC"/>
-                      </a:solidFill>
-                      <a:prstDash val="solid"/>
-                      <a:round/>
-                      <a:headEnd type="none" w="med" len="med"/>
-                      <a:tailEnd type="none" w="med" len="med"/>
-                    </a:lnR>
-                    <a:lnT w="6350" cap="flat" cmpd="sng" algn="ctr">
-                      <a:solidFill>
-                        <a:srgbClr val="E5E2DC"/>
-                      </a:solidFill>
-                      <a:prstDash val="solid"/>
-                      <a:round/>
-                      <a:headEnd type="none" w="med" len="med"/>
-                      <a:tailEnd type="none" w="med" len="med"/>
-                    </a:lnT>
-                    <a:lnB w="6350" cap="flat" cmpd="sng" algn="ctr">
-                      <a:solidFill>
-                        <a:srgbClr val="E5E2DC"/>
-                      </a:solidFill>
-                      <a:prstDash val="solid"/>
-                      <a:round/>
-                      <a:headEnd type="none" w="med" len="med"/>
-                      <a:tailEnd type="none" w="med" len="med"/>
-                    </a:lnB>
-                  </a:tcPr>
-                </a:tc>
-                <a:tc>
-                  <a:txBody>
-                    <a:bodyPr/>
-                    <a:lstStyle/>
-                    <a:p>
-                      <a:pPr indent="0" marL="0">
-                        <a:buNone/>
-                      </a:pPr>
-                      <a:r>
-                        <a:rPr lang="en-US" sz="1300" dirty="0">
-                          <a:solidFill>
-                            <a:srgbClr val="3D3A36"/>
-                          </a:solidFill>
-                          <a:latin typeface="Calibri" pitchFamily="34" charset="0"/>
-                          <a:ea typeface="Calibri" pitchFamily="34" charset="-122"/>
-                          <a:cs typeface="Calibri" pitchFamily="34" charset="-120"/>
-                        </a:rPr>
-                        <a:t>Removing fish faster than they reproduce</a:t>
-                      </a:r>
-                      <a:endParaRPr lang="en-US" sz="1300" dirty="0">
-                        <a:latin typeface="Calibri" charset="0"/>
-                        <a:ea typeface="Calibri" charset="0"/>
-                        <a:cs typeface="Calibri" charset="0"/>
-                      </a:endParaRPr>
-                    </a:p>
-                  </a:txBody>
-                  <a:tcPr marL="91440" marR="91440" marT="45720" marB="45720">
-                    <a:lnL w="6350" cap="flat" cmpd="sng" algn="ctr">
-                      <a:solidFill>
-                        <a:srgbClr val="E5E2DC"/>
-                      </a:solidFill>
-                      <a:prstDash val="solid"/>
-                      <a:round/>
-                      <a:headEnd type="none" w="med" len="med"/>
-                      <a:tailEnd type="none" w="med" len="med"/>
-                    </a:lnL>
-                    <a:lnR w="6350" cap="flat" cmpd="sng" algn="ctr">
-                      <a:solidFill>
-                        <a:srgbClr val="E5E2DC"/>
-                      </a:solidFill>
-                      <a:prstDash val="solid"/>
-                      <a:round/>
-                      <a:headEnd type="none" w="med" len="med"/>
-                      <a:tailEnd type="none" w="med" len="med"/>
-                    </a:lnR>
-                    <a:lnT w="6350" cap="flat" cmpd="sng" algn="ctr">
-                      <a:solidFill>
-                        <a:srgbClr val="E5E2DC"/>
-                      </a:solidFill>
-                      <a:prstDash val="solid"/>
-                      <a:round/>
-                      <a:headEnd type="none" w="med" len="med"/>
-                      <a:tailEnd type="none" w="med" len="med"/>
-                    </a:lnT>
-                    <a:lnB w="6350" cap="flat" cmpd="sng" algn="ctr">
-                      <a:solidFill>
-                        <a:srgbClr val="E5E2DC"/>
-                      </a:solidFill>
-                      <a:prstDash val="solid"/>
-                      <a:round/>
-                      <a:headEnd type="none" w="med" len="med"/>
-                      <a:tailEnd type="none" w="med" len="med"/>
-                    </a:lnB>
-                  </a:tcPr>
-                </a:tc>
-              </a:tr>
-              <a:tr h="594360">
-                <a:tc>
-                  <a:txBody>
-                    <a:bodyPr/>
-                    <a:lstStyle/>
-                    <a:p>
-                      <a:pPr indent="0" marL="0">
-                        <a:buNone/>
-                      </a:pPr>
-                      <a:r>
-                        <a:rPr lang="en-US" sz="1300" b="1" dirty="0">
-                          <a:solidFill>
-                            <a:srgbClr val="1B2A4A"/>
-                          </a:solidFill>
-                          <a:latin typeface="Calibri" pitchFamily="34" charset="0"/>
-                          <a:ea typeface="Calibri" pitchFamily="34" charset="-122"/>
-                          <a:cs typeface="Calibri" pitchFamily="34" charset="-120"/>
-                        </a:rPr>
-                        <a:t>Invasive species</a:t>
-                      </a:r>
-                      <a:endParaRPr lang="en-US" sz="1300" dirty="0">
-                        <a:latin typeface="Calibri" charset="0"/>
-                        <a:ea typeface="Calibri" charset="0"/>
-                        <a:cs typeface="Calibri" charset="0"/>
-                      </a:endParaRPr>
-                    </a:p>
-                  </a:txBody>
-                  <a:tcPr marL="91440" marR="91440" marT="45720" marB="45720">
-                    <a:lnL w="6350" cap="flat" cmpd="sng" algn="ctr">
-                      <a:solidFill>
-                        <a:srgbClr val="E5E2DC"/>
-                      </a:solidFill>
-                      <a:prstDash val="solid"/>
-                      <a:round/>
-                      <a:headEnd type="none" w="med" len="med"/>
-                      <a:tailEnd type="none" w="med" len="med"/>
-                    </a:lnL>
-                    <a:lnR w="6350" cap="flat" cmpd="sng" algn="ctr">
-                      <a:solidFill>
-                        <a:srgbClr val="E5E2DC"/>
-                      </a:solidFill>
-                      <a:prstDash val="solid"/>
-                      <a:round/>
-                      <a:headEnd type="none" w="med" len="med"/>
-                      <a:tailEnd type="none" w="med" len="med"/>
-                    </a:lnR>
-                    <a:lnT w="6350" cap="flat" cmpd="sng" algn="ctr">
-                      <a:solidFill>
-                        <a:srgbClr val="E5E2DC"/>
-                      </a:solidFill>
-                      <a:prstDash val="solid"/>
-                      <a:round/>
-                      <a:headEnd type="none" w="med" len="med"/>
-                      <a:tailEnd type="none" w="med" len="med"/>
-                    </a:lnT>
-                    <a:lnB w="6350" cap="flat" cmpd="sng" algn="ctr">
-                      <a:solidFill>
-                        <a:srgbClr val="E5E2DC"/>
-                      </a:solidFill>
-                      <a:prstDash val="solid"/>
-                      <a:round/>
-                      <a:headEnd type="none" w="med" len="med"/>
-                      <a:tailEnd type="none" w="med" len="med"/>
-                    </a:lnB>
-                  </a:tcPr>
-                </a:tc>
-                <a:tc>
-                  <a:txBody>
-                    <a:bodyPr/>
-                    <a:lstStyle/>
-                    <a:p>
-                      <a:pPr indent="0" marL="0">
-                        <a:buNone/>
-                      </a:pPr>
-                      <a:r>
-                        <a:rPr lang="en-US" sz="1300" dirty="0">
-                          <a:solidFill>
-                            <a:srgbClr val="3D3A36"/>
-                          </a:solidFill>
-                          <a:latin typeface="Calibri" pitchFamily="34" charset="0"/>
-                          <a:ea typeface="Calibri" pitchFamily="34" charset="-122"/>
-                          <a:cs typeface="Calibri" pitchFamily="34" charset="-120"/>
-                        </a:rPr>
-                        <a:t>Non-native organisms that outcompete locals</a:t>
-                      </a:r>
-                      <a:endParaRPr lang="en-US" sz="1300" dirty="0">
-                        <a:latin typeface="Calibri" charset="0"/>
-                        <a:ea typeface="Calibri" charset="0"/>
-                        <a:cs typeface="Calibri" charset="0"/>
-                      </a:endParaRPr>
-                    </a:p>
-                  </a:txBody>
-                  <a:tcPr marL="91440" marR="91440" marT="45720" marB="45720">
-                    <a:lnL w="6350" cap="flat" cmpd="sng" algn="ctr">
-                      <a:solidFill>
-                        <a:srgbClr val="E5E2DC"/>
-                      </a:solidFill>
-                      <a:prstDash val="solid"/>
-                      <a:round/>
-                      <a:headEnd type="none" w="med" len="med"/>
-                      <a:tailEnd type="none" w="med" len="med"/>
-                    </a:lnL>
-                    <a:lnR w="6350" cap="flat" cmpd="sng" algn="ctr">
-                      <a:solidFill>
-                        <a:srgbClr val="E5E2DC"/>
-                      </a:solidFill>
-                      <a:prstDash val="solid"/>
-                      <a:round/>
-                      <a:headEnd type="none" w="med" len="med"/>
-                      <a:tailEnd type="none" w="med" len="med"/>
-                    </a:lnR>
-                    <a:lnT w="6350" cap="flat" cmpd="sng" algn="ctr">
-                      <a:solidFill>
-                        <a:srgbClr val="E5E2DC"/>
-                      </a:solidFill>
-                      <a:prstDash val="solid"/>
-                      <a:round/>
-                      <a:headEnd type="none" w="med" len="med"/>
-                      <a:tailEnd type="none" w="med" len="med"/>
-                    </a:lnT>
-                    <a:lnB w="6350" cap="flat" cmpd="sng" algn="ctr">
-                      <a:solidFill>
-                        <a:srgbClr val="E5E2DC"/>
-                      </a:solidFill>
-                      <a:prstDash val="solid"/>
-                      <a:round/>
-                      <a:headEnd type="none" w="med" len="med"/>
-                      <a:tailEnd type="none" w="med" len="med"/>
-                    </a:lnB>
-                  </a:tcPr>
-                </a:tc>
-              </a:tr>
-              <a:tr h="594360">
-                <a:tc>
-                  <a:txBody>
-                    <a:bodyPr/>
-                    <a:lstStyle/>
-                    <a:p>
-                      <a:pPr indent="0" marL="0">
-                        <a:buNone/>
-                      </a:pPr>
-                      <a:r>
-                        <a:rPr lang="en-US" sz="1300" b="1" dirty="0">
-                          <a:solidFill>
-                            <a:srgbClr val="1B2A4A"/>
-                          </a:solidFill>
-                          <a:latin typeface="Calibri" pitchFamily="34" charset="0"/>
-                          <a:ea typeface="Calibri" pitchFamily="34" charset="-122"/>
-                          <a:cs typeface="Calibri" pitchFamily="34" charset="-120"/>
-                        </a:rPr>
-                        <a:t>Climate change</a:t>
-                      </a:r>
-                      <a:endParaRPr lang="en-US" sz="1300" dirty="0">
-                        <a:latin typeface="Calibri" charset="0"/>
-                        <a:ea typeface="Calibri" charset="0"/>
-                        <a:cs typeface="Calibri" charset="0"/>
-                      </a:endParaRPr>
-                    </a:p>
-                  </a:txBody>
-                  <a:tcPr marL="91440" marR="91440" marT="45720" marB="45720">
-                    <a:lnL w="6350" cap="flat" cmpd="sng" algn="ctr">
-                      <a:solidFill>
-                        <a:srgbClr val="E5E2DC"/>
-                      </a:solidFill>
-                      <a:prstDash val="solid"/>
-                      <a:round/>
-                      <a:headEnd type="none" w="med" len="med"/>
-                      <a:tailEnd type="none" w="med" len="med"/>
-                    </a:lnL>
-                    <a:lnR w="6350" cap="flat" cmpd="sng" algn="ctr">
-                      <a:solidFill>
-                        <a:srgbClr val="E5E2DC"/>
-                      </a:solidFill>
-                      <a:prstDash val="solid"/>
-                      <a:round/>
-                      <a:headEnd type="none" w="med" len="med"/>
-                      <a:tailEnd type="none" w="med" len="med"/>
-                    </a:lnR>
-                    <a:lnT w="6350" cap="flat" cmpd="sng" algn="ctr">
-                      <a:solidFill>
-                        <a:srgbClr val="E5E2DC"/>
-                      </a:solidFill>
-                      <a:prstDash val="solid"/>
-                      <a:round/>
-                      <a:headEnd type="none" w="med" len="med"/>
-                      <a:tailEnd type="none" w="med" len="med"/>
-                    </a:lnT>
-                    <a:lnB w="6350" cap="flat" cmpd="sng" algn="ctr">
-                      <a:solidFill>
-                        <a:srgbClr val="E5E2DC"/>
-                      </a:solidFill>
-                      <a:prstDash val="solid"/>
-                      <a:round/>
-                      <a:headEnd type="none" w="med" len="med"/>
-                      <a:tailEnd type="none" w="med" len="med"/>
-                    </a:lnB>
-                  </a:tcPr>
-                </a:tc>
-                <a:tc>
-                  <a:txBody>
-                    <a:bodyPr/>
-                    <a:lstStyle/>
-                    <a:p>
-                      <a:pPr indent="0" marL="0">
-                        <a:buNone/>
-                      </a:pPr>
-                      <a:r>
-                        <a:rPr lang="en-US" sz="1300" dirty="0">
-                          <a:solidFill>
-                            <a:srgbClr val="3D3A36"/>
-                          </a:solidFill>
-                          <a:latin typeface="Calibri" pitchFamily="34" charset="0"/>
-                          <a:ea typeface="Calibri" pitchFamily="34" charset="-122"/>
-                          <a:cs typeface="Calibri" pitchFamily="34" charset="-120"/>
-                        </a:rPr>
-                        <a:t>Long-term shifts in temperature and weather</a:t>
-                      </a:r>
-                      <a:endParaRPr lang="en-US" sz="1300" dirty="0">
-                        <a:latin typeface="Calibri" charset="0"/>
-                        <a:ea typeface="Calibri" charset="0"/>
-                        <a:cs typeface="Calibri" charset="0"/>
-                      </a:endParaRPr>
-                    </a:p>
-                  </a:txBody>
-                  <a:tcPr marL="91440" marR="91440" marT="45720" marB="45720">
-                    <a:lnL w="6350" cap="flat" cmpd="sng" algn="ctr">
-                      <a:solidFill>
-                        <a:srgbClr val="E5E2DC"/>
-                      </a:solidFill>
-                      <a:prstDash val="solid"/>
-                      <a:round/>
-                      <a:headEnd type="none" w="med" len="med"/>
-                      <a:tailEnd type="none" w="med" len="med"/>
-                    </a:lnL>
-                    <a:lnR w="6350" cap="flat" cmpd="sng" algn="ctr">
-                      <a:solidFill>
-                        <a:srgbClr val="E5E2DC"/>
-                      </a:solidFill>
-                      <a:prstDash val="solid"/>
-                      <a:round/>
-                      <a:headEnd type="none" w="med" len="med"/>
-                      <a:tailEnd type="none" w="med" len="med"/>
-                    </a:lnR>
-                    <a:lnT w="6350" cap="flat" cmpd="sng" algn="ctr">
-                      <a:solidFill>
-                        <a:srgbClr val="E5E2DC"/>
-                      </a:solidFill>
-                      <a:prstDash val="solid"/>
-                      <a:round/>
-                      <a:headEnd type="none" w="med" len="med"/>
-                      <a:tailEnd type="none" w="med" len="med"/>
-                    </a:lnT>
-                    <a:lnB w="6350" cap="flat" cmpd="sng" algn="ctr">
-                      <a:solidFill>
-                        <a:srgbClr val="E5E2DC"/>
-                      </a:solidFill>
-                      <a:prstDash val="solid"/>
-                      <a:round/>
-                      <a:headEnd type="none" w="med" len="med"/>
-                      <a:tailEnd type="none" w="med" len="med"/>
-                    </a:lnB>
-                  </a:tcPr>
-                </a:tc>
-              </a:tr>
-            </a:tbl>
-          </a:graphicData>
-        </a:graphic>
-      </p:graphicFrame>
+              <a:t>Negative Impacts</a:t>
+            </a:r>
+            <a:endParaRPr lang="en-US" sz="2200" dirty="0"/>
+          </a:p>
+        </p:txBody>
+      </p:sp>
+      <p:sp>
+        <p:nvSpPr>
+          <p:cNvPr id="5" name="Text 3"/>
+          <p:cNvSpPr/>
+          <p:nvPr/>
+        </p:nvSpPr>
+        <p:spPr>
+          <a:xfrm>
+            <a:off x="640080" y="1005840"/>
+            <a:ext cx="7863840" cy="2926080"/>
+          </a:xfrm>
+          <a:prstGeom prst="rect">
+            <a:avLst/>
+          </a:prstGeom>
+          <a:noFill/>
+          <a:ln/>
+        </p:spPr>
+        <p:txBody>
+          <a:bodyPr wrap="square" rtlCol="0" anchor="ctr"/>
+          <a:lstStyle/>
+          <a:p>
+            <a:pPr marL="342900" indent="-342900">
+              <a:spcAft>
+                <a:spcPts val="800"/>
+              </a:spcAft>
+              <a:buSzPct val="100000"/>
+              <a:buChar char="•"/>
+            </a:pPr>
+            <a:r>
+              <a:rPr lang="en-US" sz="1600" dirty="0">
+                <a:solidFill>
+                  <a:srgbClr val="3D3A36"/>
+                </a:solidFill>
+                <a:latin typeface="Calibri" pitchFamily="34" charset="0"/>
+                <a:ea typeface="Calibri" pitchFamily="34" charset="-122"/>
+                <a:cs typeface="Calibri" pitchFamily="34" charset="-120"/>
+              </a:rPr>
+              <a:t>Deforestation — removes habitats and carbon sinks.</a:t>
+            </a:r>
+            <a:endParaRPr lang="en-US" sz="1600" dirty="0"/>
+          </a:p>
+          <a:p>
+            <a:pPr marL="342900" indent="-342900">
+              <a:spcAft>
+                <a:spcPts val="800"/>
+              </a:spcAft>
+              <a:buSzPct val="100000"/>
+              <a:buChar char="•"/>
+            </a:pPr>
+            <a:r>
+              <a:rPr lang="en-US" sz="1600" dirty="0">
+                <a:solidFill>
+                  <a:srgbClr val="3D3A36"/>
+                </a:solidFill>
+                <a:latin typeface="Calibri" pitchFamily="34" charset="0"/>
+                <a:ea typeface="Calibri" pitchFamily="34" charset="-122"/>
+                <a:cs typeface="Calibri" pitchFamily="34" charset="-120"/>
+              </a:rPr>
+              <a:t>Pollution — contaminates water, air, soil.</a:t>
+            </a:r>
+            <a:endParaRPr lang="en-US" sz="1600" dirty="0"/>
+          </a:p>
+          <a:p>
+            <a:pPr marL="342900" indent="-342900">
+              <a:spcAft>
+                <a:spcPts val="800"/>
+              </a:spcAft>
+              <a:buSzPct val="100000"/>
+              <a:buChar char="•"/>
+            </a:pPr>
+            <a:r>
+              <a:rPr lang="en-US" sz="1600" dirty="0">
+                <a:solidFill>
+                  <a:srgbClr val="3D3A36"/>
+                </a:solidFill>
+                <a:latin typeface="Calibri" pitchFamily="34" charset="0"/>
+                <a:ea typeface="Calibri" pitchFamily="34" charset="-122"/>
+                <a:cs typeface="Calibri" pitchFamily="34" charset="-120"/>
+              </a:rPr>
+              <a:t>Overfishing — depletes populations (Yangtze River crisis).</a:t>
+            </a:r>
+            <a:endParaRPr lang="en-US" sz="1600" dirty="0"/>
+          </a:p>
+          <a:p>
+            <a:pPr marL="342900" indent="-342900">
+              <a:spcAft>
+                <a:spcPts val="800"/>
+              </a:spcAft>
+              <a:buSzPct val="100000"/>
+              <a:buChar char="•"/>
+            </a:pPr>
+            <a:r>
+              <a:rPr lang="en-US" sz="1600" dirty="0">
+                <a:solidFill>
+                  <a:srgbClr val="3D3A36"/>
+                </a:solidFill>
+                <a:latin typeface="Calibri" pitchFamily="34" charset="0"/>
+                <a:ea typeface="Calibri" pitchFamily="34" charset="-122"/>
+                <a:cs typeface="Calibri" pitchFamily="34" charset="-120"/>
+              </a:rPr>
+              <a:t>Climate change — alters temperatures globally.</a:t>
+            </a:r>
+            <a:endParaRPr lang="en-US" sz="1600" dirty="0"/>
+          </a:p>
+          <a:p>
+            <a:pPr marL="342900" indent="-342900">
+              <a:spcAft>
+                <a:spcPts val="800"/>
+              </a:spcAft>
+              <a:buSzPct val="100000"/>
+              <a:buChar char="•"/>
+            </a:pPr>
+            <a:r>
+              <a:rPr lang="en-US" sz="1600" dirty="0">
+                <a:solidFill>
+                  <a:srgbClr val="3D3A36"/>
+                </a:solidFill>
+                <a:latin typeface="Calibri" pitchFamily="34" charset="0"/>
+                <a:ea typeface="Calibri" pitchFamily="34" charset="-122"/>
+                <a:cs typeface="Calibri" pitchFamily="34" charset="-120"/>
+              </a:rPr>
+              <a:t>Urbanisation — Nanjing's expansion into surrounding farmland.</a:t>
+            </a:r>
+            <a:endParaRPr lang="en-US" sz="1600" dirty="0"/>
+          </a:p>
+        </p:txBody>
+      </p:sp>
     </p:spTree>
   </p:cSld>
   <p:clrMapOvr>
@@ -2623,26 +2418,6 @@
             <a:avLst/>
           </a:prstGeom>
           <a:solidFill>
-            <a:srgbClr val="FAF8F5"/>
-          </a:solidFill>
-          <a:ln/>
-        </p:spPr>
-      </p:sp>
-      <p:sp>
-        <p:nvSpPr>
-          <p:cNvPr id="3" name="Shape 1"/>
-          <p:cNvSpPr/>
-          <p:nvPr/>
-        </p:nvSpPr>
-        <p:spPr>
-          <a:xfrm>
-            <a:off x="0" y="0"/>
-            <a:ext cx="9144000" cy="54864"/>
-          </a:xfrm>
-          <a:prstGeom prst="rect">
-            <a:avLst/>
-          </a:prstGeom>
-          <a:solidFill>
             <a:srgbClr val="1B2A4A"/>
           </a:solidFill>
           <a:ln/>
@@ -2650,13 +2425,13 @@
       </p:sp>
       <p:sp>
         <p:nvSpPr>
-          <p:cNvPr id="4" name="Text 2"/>
-          <p:cNvSpPr/>
-          <p:nvPr/>
-        </p:nvSpPr>
-        <p:spPr>
-          <a:xfrm>
-            <a:off x="640080" y="320040"/>
+          <p:cNvPr id="3" name="Text 1"/>
+          <p:cNvSpPr/>
+          <p:nvPr/>
+        </p:nvSpPr>
+        <p:spPr>
+          <a:xfrm>
+            <a:off x="640080" y="365760"/>
             <a:ext cx="7863840" cy="640080"/>
           </a:xfrm>
           <a:prstGeom prst="rect">
@@ -2666,26 +2441,53 @@
           <a:ln/>
         </p:spPr>
         <p:txBody>
-          <a:bodyPr wrap="square" lIns="0" tIns="0" rIns="0" bIns="0" rtlCol="0" anchor="ctr"/>
+          <a:bodyPr wrap="square" rtlCol="0" anchor="ctr"/>
           <a:lstStyle/>
           <a:p>
             <a:pPr indent="0" marL="0">
               <a:buNone/>
             </a:pPr>
             <a:r>
-              <a:rPr lang="en-US" sz="2600" b="1" dirty="0">
-                <a:solidFill>
-                  <a:srgbClr val="1B2A4A"/>
+              <a:rPr lang="en-US" sz="2200" b="1" dirty="0">
+                <a:solidFill>
+                  <a:srgbClr val="FFFFFF"/>
                 </a:solidFill>
                 <a:latin typeface="Georgia" pitchFamily="34" charset="0"/>
                 <a:ea typeface="Georgia" pitchFamily="34" charset="-122"/>
                 <a:cs typeface="Georgia" pitchFamily="34" charset="-120"/>
               </a:rPr>
-              <a:t>Key Concept: Systems</a:t>
-            </a:r>
-            <a:endParaRPr lang="en-US" sz="2600" dirty="0"/>
-          </a:p>
-        </p:txBody>
+              <a:t>Human Impact by Numbers</a:t>
+            </a:r>
+            <a:endParaRPr lang="en-US" sz="2200" dirty="0"/>
+          </a:p>
+        </p:txBody>
+      </p:sp>
+      <p:sp>
+        <p:nvSpPr>
+          <p:cNvPr id="4" name="Shape 2"/>
+          <p:cNvSpPr/>
+          <p:nvPr/>
+        </p:nvSpPr>
+        <p:spPr>
+          <a:xfrm>
+            <a:off x="640080" y="1280160"/>
+            <a:ext cx="2438400" cy="2926080"/>
+          </a:xfrm>
+          <a:prstGeom prst="rect">
+            <a:avLst/>
+          </a:prstGeom>
+          <a:solidFill>
+            <a:srgbClr val="243660"/>
+          </a:solidFill>
+          <a:ln/>
+          <a:effectLst>
+            <a:outerShdw sx="100000" sy="100000" kx="0" ky="0" algn="bl" rotWithShape="0" blurRad="76200" dist="25400" dir="8100000">
+              <a:srgbClr val="000000">
+                <a:alpha val="12000"/>
+              </a:srgbClr>
+            </a:outerShdw>
+          </a:effectLst>
+        </p:spPr>
       </p:sp>
       <p:sp>
         <p:nvSpPr>
@@ -2695,8 +2497,8 @@
         </p:nvSpPr>
         <p:spPr>
           <a:xfrm>
-            <a:off x="640080" y="1188720"/>
-            <a:ext cx="7863840" cy="3200400"/>
+            <a:off x="640080" y="1463040"/>
+            <a:ext cx="2438400" cy="1280160"/>
           </a:xfrm>
           <a:prstGeom prst="rect">
             <a:avLst/>
@@ -2705,115 +2507,65 @@
           <a:ln/>
         </p:spPr>
         <p:txBody>
-          <a:bodyPr wrap="square" rtlCol="0" anchor="t"/>
-          <a:lstStyle/>
-          <a:p>
-            <a:pPr marL="342900" indent="-342900">
-              <a:lnSpc>
-                <a:spcPct val="140000"/>
-              </a:lnSpc>
-              <a:buSzPct val="100000"/>
-              <a:buChar char="•"/>
-            </a:pPr>
-            <a:r>
-              <a:rPr lang="en-US" sz="1500" dirty="0">
-                <a:solidFill>
-                  <a:srgbClr val="3D3A36"/>
-                </a:solidFill>
-                <a:latin typeface="Calibri" pitchFamily="34" charset="0"/>
-                <a:ea typeface="Calibri" pitchFamily="34" charset="-122"/>
-                <a:cs typeface="Calibri" pitchFamily="34" charset="-120"/>
-              </a:rPr>
-              <a:t>An ecosystem is a SYSTEM — every part is connected.</a:t>
-            </a:r>
-            <a:endParaRPr lang="en-US" sz="1500" dirty="0"/>
-          </a:p>
-          <a:p>
-            <a:pPr marL="342900" indent="-342900">
-              <a:lnSpc>
-                <a:spcPct val="140000"/>
-              </a:lnSpc>
-              <a:buSzPct val="100000"/>
-              <a:buChar char="•"/>
-            </a:pPr>
-            <a:r>
-              <a:rPr lang="en-US" sz="1500" dirty="0">
-                <a:solidFill>
-                  <a:srgbClr val="3D3A36"/>
-                </a:solidFill>
-                <a:latin typeface="Calibri" pitchFamily="34" charset="0"/>
-                <a:ea typeface="Calibri" pitchFamily="34" charset="-122"/>
-                <a:cs typeface="Calibri" pitchFamily="34" charset="-120"/>
-              </a:rPr>
-              <a:t>Changing one component affects the entire system.</a:t>
-            </a:r>
-            <a:endParaRPr lang="en-US" sz="1500" dirty="0"/>
-          </a:p>
-          <a:p>
-            <a:pPr marL="342900" indent="-342900">
-              <a:lnSpc>
-                <a:spcPct val="140000"/>
-              </a:lnSpc>
-              <a:buSzPct val="100000"/>
-              <a:buChar char="•"/>
-            </a:pPr>
-            <a:r>
-              <a:rPr lang="en-US" sz="1500" dirty="0">
-                <a:solidFill>
-                  <a:srgbClr val="3D3A36"/>
-                </a:solidFill>
-                <a:latin typeface="Calibri" pitchFamily="34" charset="0"/>
-                <a:ea typeface="Calibri" pitchFamily="34" charset="-122"/>
-                <a:cs typeface="Calibri" pitchFamily="34" charset="-120"/>
-              </a:rPr>
-              <a:t>Effects can be difficult to predict.</a:t>
-            </a:r>
-            <a:endParaRPr lang="en-US" sz="1500" dirty="0"/>
-          </a:p>
-          <a:p>
-            <a:pPr marL="342900" indent="-342900">
-              <a:lnSpc>
-                <a:spcPct val="140000"/>
-              </a:lnSpc>
-              <a:buSzPct val="100000"/>
-              <a:buChar char="•"/>
-            </a:pPr>
-            <a:r>
-              <a:rPr lang="en-US" sz="1500" dirty="0">
-                <a:solidFill>
-                  <a:srgbClr val="3D3A36"/>
-                </a:solidFill>
-                <a:latin typeface="Calibri" pitchFamily="34" charset="0"/>
-                <a:ea typeface="Calibri" pitchFamily="34" charset="-122"/>
-                <a:cs typeface="Calibri" pitchFamily="34" charset="-120"/>
-              </a:rPr>
-              <a:t>Conservation requires understanding these connections.</a:t>
-            </a:r>
-            <a:endParaRPr lang="en-US" sz="1500" dirty="0"/>
-          </a:p>
-        </p:txBody>
-      </p:sp>
-      <p:sp>
-        <p:nvSpPr>
-          <p:cNvPr id="6" name="Shape 4"/>
-          <p:cNvSpPr/>
-          <p:nvPr/>
-        </p:nvSpPr>
-        <p:spPr>
-          <a:xfrm>
-            <a:off x="640080" y="4206240"/>
-            <a:ext cx="7863840" cy="640080"/>
-          </a:xfrm>
-          <a:prstGeom prst="roundRect">
-            <a:avLst>
-              <a:gd name="adj" fmla="val 11429"/>
-            </a:avLst>
-          </a:prstGeom>
-          <a:solidFill>
-            <a:srgbClr val="E8F5F3"/>
-          </a:solidFill>
-          <a:ln/>
-        </p:spPr>
+          <a:bodyPr wrap="square" rtlCol="0" anchor="ctr"/>
+          <a:lstStyle/>
+          <a:p>
+            <a:pPr algn="ctr" indent="0" marL="0">
+              <a:buNone/>
+            </a:pPr>
+            <a:r>
+              <a:rPr lang="en-US" sz="4800" b="1" dirty="0">
+                <a:solidFill>
+                  <a:srgbClr val="E9C46A"/>
+                </a:solidFill>
+                <a:latin typeface="Georgia" pitchFamily="34" charset="0"/>
+                <a:ea typeface="Georgia" pitchFamily="34" charset="-122"/>
+                <a:cs typeface="Georgia" pitchFamily="34" charset="-120"/>
+              </a:rPr>
+              <a:t>1M+</a:t>
+            </a:r>
+            <a:endParaRPr lang="en-US" sz="4800" dirty="0"/>
+          </a:p>
+        </p:txBody>
+      </p:sp>
+      <p:sp>
+        <p:nvSpPr>
+          <p:cNvPr id="6" name="Text 4"/>
+          <p:cNvSpPr/>
+          <p:nvPr/>
+        </p:nvSpPr>
+        <p:spPr>
+          <a:xfrm>
+            <a:off x="640080" y="2743200"/>
+            <a:ext cx="2438400" cy="548640"/>
+          </a:xfrm>
+          <a:prstGeom prst="rect">
+            <a:avLst/>
+          </a:prstGeom>
+          <a:noFill/>
+          <a:ln/>
+        </p:spPr>
+        <p:txBody>
+          <a:bodyPr wrap="square" rtlCol="0" anchor="ctr"/>
+          <a:lstStyle/>
+          <a:p>
+            <a:pPr algn="ctr" indent="0" marL="0">
+              <a:buNone/>
+            </a:pPr>
+            <a:r>
+              <a:rPr lang="en-US" sz="1400" b="1" dirty="0">
+                <a:solidFill>
+                  <a:srgbClr val="9B9690"/>
+                </a:solidFill>
+                <a:latin typeface="Calibri" pitchFamily="34" charset="0"/>
+                <a:ea typeface="Calibri" pitchFamily="34" charset="-122"/>
+                <a:cs typeface="Calibri" pitchFamily="34" charset="-120"/>
+              </a:rPr>
+              <a:t>Species at Risk</a:t>
+            </a:r>
+            <a:endParaRPr lang="en-US" sz="1400" dirty="0"/>
+          </a:p>
+        </p:txBody>
       </p:sp>
       <p:sp>
         <p:nvSpPr>
@@ -2823,8 +2575,8 @@
         </p:nvSpPr>
         <p:spPr>
           <a:xfrm>
-            <a:off x="822960" y="4251960"/>
-            <a:ext cx="7498080" cy="548640"/>
+            <a:off x="822960" y="3291840"/>
+            <a:ext cx="2072640" cy="731520"/>
           </a:xfrm>
           <a:prstGeom prst="rect">
             <a:avLst/>
@@ -2836,19 +2588,307 @@
           <a:bodyPr wrap="square" rtlCol="0" anchor="ctr"/>
           <a:lstStyle/>
           <a:p>
-            <a:pPr indent="0" marL="0">
+            <a:pPr algn="ctr" indent="0" marL="0">
               <a:buNone/>
             </a:pPr>
             <a:r>
-              <a:rPr lang="en-US" sz="1200" i="1" dirty="0">
-                <a:solidFill>
-                  <a:srgbClr val="2A9D8F"/>
-                </a:solidFill>
-                <a:latin typeface="Calibri" pitchFamily="34" charset="0"/>
-                <a:ea typeface="Calibri" pitchFamily="34" charset="-122"/>
-                <a:cs typeface="Calibri" pitchFamily="34" charset="-120"/>
-              </a:rPr>
-              <a:t>Removing a predator might seem harmless — but it can change everything.</a:t>
+              <a:rPr lang="en-US" sz="1200" dirty="0">
+                <a:solidFill>
+                  <a:srgbClr val="9B9690"/>
+                </a:solidFill>
+                <a:latin typeface="Calibri" pitchFamily="34" charset="0"/>
+                <a:ea typeface="Calibri" pitchFamily="34" charset="-122"/>
+                <a:cs typeface="Calibri" pitchFamily="34" charset="-120"/>
+              </a:rPr>
+              <a:t>Due to human activity</a:t>
+            </a:r>
+            <a:endParaRPr lang="en-US" sz="1200" dirty="0"/>
+          </a:p>
+        </p:txBody>
+      </p:sp>
+      <p:sp>
+        <p:nvSpPr>
+          <p:cNvPr id="8" name="Shape 6"/>
+          <p:cNvSpPr/>
+          <p:nvPr/>
+        </p:nvSpPr>
+        <p:spPr>
+          <a:xfrm>
+            <a:off x="3352800" y="1280160"/>
+            <a:ext cx="2438400" cy="2926080"/>
+          </a:xfrm>
+          <a:prstGeom prst="rect">
+            <a:avLst/>
+          </a:prstGeom>
+          <a:solidFill>
+            <a:srgbClr val="243660"/>
+          </a:solidFill>
+          <a:ln/>
+          <a:effectLst>
+            <a:outerShdw sx="100000" sy="100000" kx="0" ky="0" algn="bl" rotWithShape="0" blurRad="76200" dist="25400" dir="8100000">
+              <a:srgbClr val="000000">
+                <a:alpha val="12000"/>
+              </a:srgbClr>
+            </a:outerShdw>
+          </a:effectLst>
+        </p:spPr>
+      </p:sp>
+      <p:sp>
+        <p:nvSpPr>
+          <p:cNvPr id="9" name="Text 7"/>
+          <p:cNvSpPr/>
+          <p:nvPr/>
+        </p:nvSpPr>
+        <p:spPr>
+          <a:xfrm>
+            <a:off x="3352800" y="1463040"/>
+            <a:ext cx="2438400" cy="1280160"/>
+          </a:xfrm>
+          <a:prstGeom prst="rect">
+            <a:avLst/>
+          </a:prstGeom>
+          <a:noFill/>
+          <a:ln/>
+        </p:spPr>
+        <p:txBody>
+          <a:bodyPr wrap="square" rtlCol="0" anchor="ctr"/>
+          <a:lstStyle/>
+          <a:p>
+            <a:pPr algn="ctr" indent="0" marL="0">
+              <a:buNone/>
+            </a:pPr>
+            <a:r>
+              <a:rPr lang="en-US" sz="4800" b="1" dirty="0">
+                <a:solidFill>
+                  <a:srgbClr val="E9C46A"/>
+                </a:solidFill>
+                <a:latin typeface="Georgia" pitchFamily="34" charset="0"/>
+                <a:ea typeface="Georgia" pitchFamily="34" charset="-122"/>
+                <a:cs typeface="Georgia" pitchFamily="34" charset="-120"/>
+              </a:rPr>
+              <a:t>80%</a:t>
+            </a:r>
+            <a:endParaRPr lang="en-US" sz="4800" dirty="0"/>
+          </a:p>
+        </p:txBody>
+      </p:sp>
+      <p:sp>
+        <p:nvSpPr>
+          <p:cNvPr id="10" name="Text 8"/>
+          <p:cNvSpPr/>
+          <p:nvPr/>
+        </p:nvSpPr>
+        <p:spPr>
+          <a:xfrm>
+            <a:off x="3352800" y="2743200"/>
+            <a:ext cx="2438400" cy="548640"/>
+          </a:xfrm>
+          <a:prstGeom prst="rect">
+            <a:avLst/>
+          </a:prstGeom>
+          <a:noFill/>
+          <a:ln/>
+        </p:spPr>
+        <p:txBody>
+          <a:bodyPr wrap="square" rtlCol="0" anchor="ctr"/>
+          <a:lstStyle/>
+          <a:p>
+            <a:pPr algn="ctr" indent="0" marL="0">
+              <a:buNone/>
+            </a:pPr>
+            <a:r>
+              <a:rPr lang="en-US" sz="1400" b="1" dirty="0">
+                <a:solidFill>
+                  <a:srgbClr val="9B9690"/>
+                </a:solidFill>
+                <a:latin typeface="Calibri" pitchFamily="34" charset="0"/>
+                <a:ea typeface="Calibri" pitchFamily="34" charset="-122"/>
+                <a:cs typeface="Calibri" pitchFamily="34" charset="-120"/>
+              </a:rPr>
+              <a:t>Forests Lost</a:t>
+            </a:r>
+            <a:endParaRPr lang="en-US" sz="1400" dirty="0"/>
+          </a:p>
+        </p:txBody>
+      </p:sp>
+      <p:sp>
+        <p:nvSpPr>
+          <p:cNvPr id="11" name="Text 9"/>
+          <p:cNvSpPr/>
+          <p:nvPr/>
+        </p:nvSpPr>
+        <p:spPr>
+          <a:xfrm>
+            <a:off x="3535680" y="3291840"/>
+            <a:ext cx="2072640" cy="731520"/>
+          </a:xfrm>
+          <a:prstGeom prst="rect">
+            <a:avLst/>
+          </a:prstGeom>
+          <a:noFill/>
+          <a:ln/>
+        </p:spPr>
+        <p:txBody>
+          <a:bodyPr wrap="square" rtlCol="0" anchor="ctr"/>
+          <a:lstStyle/>
+          <a:p>
+            <a:pPr algn="ctr" indent="0" marL="0">
+              <a:buNone/>
+            </a:pPr>
+            <a:r>
+              <a:rPr lang="en-US" sz="1200" dirty="0">
+                <a:solidFill>
+                  <a:srgbClr val="9B9690"/>
+                </a:solidFill>
+                <a:latin typeface="Calibri" pitchFamily="34" charset="0"/>
+                <a:ea typeface="Calibri" pitchFamily="34" charset="-122"/>
+                <a:cs typeface="Calibri" pitchFamily="34" charset="-120"/>
+              </a:rPr>
+              <a:t>Since civilisation began</a:t>
+            </a:r>
+            <a:endParaRPr lang="en-US" sz="1200" dirty="0"/>
+          </a:p>
+        </p:txBody>
+      </p:sp>
+      <p:sp>
+        <p:nvSpPr>
+          <p:cNvPr id="12" name="Shape 10"/>
+          <p:cNvSpPr/>
+          <p:nvPr/>
+        </p:nvSpPr>
+        <p:spPr>
+          <a:xfrm>
+            <a:off x="6065520" y="1280160"/>
+            <a:ext cx="2438400" cy="2926080"/>
+          </a:xfrm>
+          <a:prstGeom prst="rect">
+            <a:avLst/>
+          </a:prstGeom>
+          <a:solidFill>
+            <a:srgbClr val="243660"/>
+          </a:solidFill>
+          <a:ln/>
+          <a:effectLst>
+            <a:outerShdw sx="100000" sy="100000" kx="0" ky="0" algn="bl" rotWithShape="0" blurRad="76200" dist="25400" dir="8100000">
+              <a:srgbClr val="000000">
+                <a:alpha val="12000"/>
+              </a:srgbClr>
+            </a:outerShdw>
+          </a:effectLst>
+        </p:spPr>
+      </p:sp>
+      <p:sp>
+        <p:nvSpPr>
+          <p:cNvPr id="13" name="Text 11"/>
+          <p:cNvSpPr/>
+          <p:nvPr/>
+        </p:nvSpPr>
+        <p:spPr>
+          <a:xfrm>
+            <a:off x="6065520" y="1463040"/>
+            <a:ext cx="2438400" cy="1280160"/>
+          </a:xfrm>
+          <a:prstGeom prst="rect">
+            <a:avLst/>
+          </a:prstGeom>
+          <a:noFill/>
+          <a:ln/>
+        </p:spPr>
+        <p:txBody>
+          <a:bodyPr wrap="square" rtlCol="0" anchor="ctr"/>
+          <a:lstStyle/>
+          <a:p>
+            <a:pPr algn="ctr" indent="0" marL="0">
+              <a:buNone/>
+            </a:pPr>
+            <a:r>
+              <a:rPr lang="en-US" sz="4800" b="1" dirty="0">
+                <a:solidFill>
+                  <a:srgbClr val="E9C46A"/>
+                </a:solidFill>
+                <a:latin typeface="Georgia" pitchFamily="34" charset="0"/>
+                <a:ea typeface="Georgia" pitchFamily="34" charset="-122"/>
+                <a:cs typeface="Georgia" pitchFamily="34" charset="-120"/>
+              </a:rPr>
+              <a:t>1.1°C</a:t>
+            </a:r>
+            <a:endParaRPr lang="en-US" sz="4800" dirty="0"/>
+          </a:p>
+        </p:txBody>
+      </p:sp>
+      <p:sp>
+        <p:nvSpPr>
+          <p:cNvPr id="14" name="Text 12"/>
+          <p:cNvSpPr/>
+          <p:nvPr/>
+        </p:nvSpPr>
+        <p:spPr>
+          <a:xfrm>
+            <a:off x="6065520" y="2743200"/>
+            <a:ext cx="2438400" cy="548640"/>
+          </a:xfrm>
+          <a:prstGeom prst="rect">
+            <a:avLst/>
+          </a:prstGeom>
+          <a:noFill/>
+          <a:ln/>
+        </p:spPr>
+        <p:txBody>
+          <a:bodyPr wrap="square" rtlCol="0" anchor="ctr"/>
+          <a:lstStyle/>
+          <a:p>
+            <a:pPr algn="ctr" indent="0" marL="0">
+              <a:buNone/>
+            </a:pPr>
+            <a:r>
+              <a:rPr lang="en-US" sz="1400" b="1" dirty="0">
+                <a:solidFill>
+                  <a:srgbClr val="9B9690"/>
+                </a:solidFill>
+                <a:latin typeface="Calibri" pitchFamily="34" charset="0"/>
+                <a:ea typeface="Calibri" pitchFamily="34" charset="-122"/>
+                <a:cs typeface="Calibri" pitchFamily="34" charset="-120"/>
+              </a:rPr>
+              <a:t>Warming</a:t>
+            </a:r>
+            <a:endParaRPr lang="en-US" sz="1400" dirty="0"/>
+          </a:p>
+        </p:txBody>
+      </p:sp>
+      <p:sp>
+        <p:nvSpPr>
+          <p:cNvPr id="15" name="Text 13"/>
+          <p:cNvSpPr/>
+          <p:nvPr/>
+        </p:nvSpPr>
+        <p:spPr>
+          <a:xfrm>
+            <a:off x="6248400" y="3291840"/>
+            <a:ext cx="2072640" cy="731520"/>
+          </a:xfrm>
+          <a:prstGeom prst="rect">
+            <a:avLst/>
+          </a:prstGeom>
+          <a:noFill/>
+          <a:ln/>
+        </p:spPr>
+        <p:txBody>
+          <a:bodyPr wrap="square" rtlCol="0" anchor="ctr"/>
+          <a:lstStyle/>
+          <a:p>
+            <a:pPr algn="ctr" indent="0" marL="0">
+              <a:buNone/>
+            </a:pPr>
+            <a:r>
+              <a:rPr lang="en-US" sz="1200" dirty="0">
+                <a:solidFill>
+                  <a:srgbClr val="9B9690"/>
+                </a:solidFill>
+                <a:latin typeface="Calibri" pitchFamily="34" charset="0"/>
+                <a:ea typeface="Calibri" pitchFamily="34" charset="-122"/>
+                <a:cs typeface="Calibri" pitchFamily="34" charset="-120"/>
+              </a:rPr>
+              <a:t>Since 1900</a:t>
             </a:r>
             <a:endParaRPr lang="en-US" sz="1200" dirty="0"/>
           </a:p>
@@ -2865,6 +2905,13 @@
 <file path=ppt/slides/slide5.xml><?xml version="1.0" encoding="utf-8"?>
 <p:sld xmlns:a="http://schemas.openxmlformats.org/drawingml/2006/main" xmlns:r="http://schemas.openxmlformats.org/officeDocument/2006/relationships" xmlns:p="http://schemas.openxmlformats.org/presentationml/2006/main">
   <p:cSld name="Slide 5">
+    <p:bg>
+      <p:bgPr>
+        <a:solidFill>
+          <a:srgbClr val="FAF8F5"/>
+        </a:solidFill>
+      </p:bgPr>
+    </p:bg>
     <p:spTree>
       <p:nvGrpSpPr>
         <p:cNvPr id="1" name=""/>
@@ -2888,13 +2935,13 @@
         <p:spPr>
           <a:xfrm>
             <a:off x="0" y="0"/>
-            <a:ext cx="9144000" cy="5143500"/>
-          </a:xfrm>
-          <a:prstGeom prst="rect">
-            <a:avLst/>
-          </a:prstGeom>
-          <a:solidFill>
-            <a:srgbClr val="1B2A4A"/>
+            <a:ext cx="9144000" cy="822960"/>
+          </a:xfrm>
+          <a:prstGeom prst="rect">
+            <a:avLst/>
+          </a:prstGeom>
+          <a:solidFill>
+            <a:srgbClr val="FFFFFF"/>
           </a:solidFill>
           <a:ln/>
         </p:spPr>
@@ -2907,14 +2954,14 @@
         </p:nvSpPr>
         <p:spPr>
           <a:xfrm>
-            <a:off x="0" y="4777740"/>
-            <a:ext cx="9144000" cy="365760"/>
-          </a:xfrm>
-          <a:prstGeom prst="rect">
-            <a:avLst/>
-          </a:prstGeom>
-          <a:solidFill>
-            <a:srgbClr val="1B2A4A"/>
+            <a:off x="0" y="795528"/>
+            <a:ext cx="9144000" cy="27432"/>
+          </a:xfrm>
+          <a:prstGeom prst="rect">
+            <a:avLst/>
+          </a:prstGeom>
+          <a:solidFill>
+            <a:srgbClr val="E9C46A"/>
           </a:solidFill>
           <a:ln/>
         </p:spPr>
@@ -2927,8 +2974,8 @@
         </p:nvSpPr>
         <p:spPr>
           <a:xfrm>
-            <a:off x="731520" y="1371600"/>
-            <a:ext cx="7680960" cy="914400"/>
+            <a:off x="640080" y="91440"/>
+            <a:ext cx="7863840" cy="640080"/>
           </a:xfrm>
           <a:prstGeom prst="rect">
             <a:avLst/>
@@ -2937,24 +2984,24 @@
           <a:ln/>
         </p:spPr>
         <p:txBody>
-          <a:bodyPr wrap="square" rtlCol="0" anchor="ctr"/>
-          <a:lstStyle/>
-          <a:p>
-            <a:pPr algn="ctr" indent="0" marL="0">
+          <a:bodyPr wrap="square" lIns="0" tIns="0" rIns="0" bIns="0" rtlCol="0" anchor="ctr"/>
+          <a:lstStyle/>
+          <a:p>
+            <a:pPr indent="0" marL="0">
               <a:buNone/>
             </a:pPr>
             <a:r>
-              <a:rPr lang="en-US" sz="3600" b="1" dirty="0">
-                <a:solidFill>
-                  <a:srgbClr val="FFFFFF"/>
+              <a:rPr lang="en-US" sz="2200" b="1" dirty="0">
+                <a:solidFill>
+                  <a:srgbClr val="1B2A4A"/>
                 </a:solidFill>
                 <a:latin typeface="Georgia" pitchFamily="34" charset="0"/>
                 <a:ea typeface="Georgia" pitchFamily="34" charset="-122"/>
                 <a:cs typeface="Georgia" pitchFamily="34" charset="-120"/>
               </a:rPr>
-              <a:t>Review &amp; Practise</a:t>
-            </a:r>
-            <a:endParaRPr lang="en-US" sz="3600" dirty="0"/>
+              <a:t>Biodiversity Loss</a:t>
+            </a:r>
+            <a:endParaRPr lang="en-US" sz="2200" dirty="0"/>
           </a:p>
         </p:txBody>
       </p:sp>
@@ -2966,8 +3013,1130 @@
         </p:nvSpPr>
         <p:spPr>
           <a:xfrm>
-            <a:off x="731520" y="2468880"/>
-            <a:ext cx="7680960" cy="548640"/>
+            <a:off x="640080" y="1005840"/>
+            <a:ext cx="7863840" cy="2926080"/>
+          </a:xfrm>
+          <a:prstGeom prst="rect">
+            <a:avLst/>
+          </a:prstGeom>
+          <a:noFill/>
+          <a:ln/>
+        </p:spPr>
+        <p:txBody>
+          <a:bodyPr wrap="square" rtlCol="0" anchor="ctr"/>
+          <a:lstStyle/>
+          <a:p>
+            <a:pPr marL="342900" indent="-342900">
+              <a:spcAft>
+                <a:spcPts val="800"/>
+              </a:spcAft>
+              <a:buSzPct val="100000"/>
+              <a:buChar char="•"/>
+            </a:pPr>
+            <a:r>
+              <a:rPr lang="en-US" sz="1600" dirty="0">
+                <a:solidFill>
+                  <a:srgbClr val="3D3A36"/>
+                </a:solidFill>
+                <a:latin typeface="Calibri" pitchFamily="34" charset="0"/>
+                <a:ea typeface="Calibri" pitchFamily="34" charset="-122"/>
+                <a:cs typeface="Calibri" pitchFamily="34" charset="-120"/>
+              </a:rPr>
+              <a:t>Biodiversity = variety of species in an ecosystem.</a:t>
+            </a:r>
+            <a:endParaRPr lang="en-US" sz="1600" dirty="0"/>
+          </a:p>
+          <a:p>
+            <a:pPr marL="342900" indent="-342900">
+              <a:spcAft>
+                <a:spcPts val="800"/>
+              </a:spcAft>
+              <a:buSzPct val="100000"/>
+              <a:buChar char="•"/>
+            </a:pPr>
+            <a:r>
+              <a:rPr lang="en-US" sz="1600" dirty="0">
+                <a:solidFill>
+                  <a:srgbClr val="3D3A36"/>
+                </a:solidFill>
+                <a:latin typeface="Calibri" pitchFamily="34" charset="0"/>
+                <a:ea typeface="Calibri" pitchFamily="34" charset="-122"/>
+                <a:cs typeface="Calibri" pitchFamily="34" charset="-120"/>
+              </a:rPr>
+              <a:t>Higher biodiversity = more stable ecosystem.</a:t>
+            </a:r>
+            <a:endParaRPr lang="en-US" sz="1600" dirty="0"/>
+          </a:p>
+          <a:p>
+            <a:pPr marL="342900" indent="-342900">
+              <a:spcAft>
+                <a:spcPts val="800"/>
+              </a:spcAft>
+              <a:buSzPct val="100000"/>
+              <a:buChar char="•"/>
+            </a:pPr>
+            <a:r>
+              <a:rPr lang="en-US" sz="1600" dirty="0">
+                <a:solidFill>
+                  <a:srgbClr val="3D3A36"/>
+                </a:solidFill>
+                <a:latin typeface="Calibri" pitchFamily="34" charset="0"/>
+                <a:ea typeface="Calibri" pitchFamily="34" charset="-122"/>
+                <a:cs typeface="Calibri" pitchFamily="34" charset="-120"/>
+              </a:rPr>
+              <a:t>Humans causing the 6th mass extinction.</a:t>
+            </a:r>
+            <a:endParaRPr lang="en-US" sz="1600" dirty="0"/>
+          </a:p>
+          <a:p>
+            <a:pPr marL="342900" indent="-342900">
+              <a:spcAft>
+                <a:spcPts val="800"/>
+              </a:spcAft>
+              <a:buSzPct val="100000"/>
+              <a:buChar char="•"/>
+            </a:pPr>
+            <a:r>
+              <a:rPr lang="en-US" sz="1600" dirty="0">
+                <a:solidFill>
+                  <a:srgbClr val="3D3A36"/>
+                </a:solidFill>
+                <a:latin typeface="Calibri" pitchFamily="34" charset="0"/>
+                <a:ea typeface="Calibri" pitchFamily="34" charset="-122"/>
+                <a:cs typeface="Calibri" pitchFamily="34" charset="-120"/>
+              </a:rPr>
+              <a:t>Yangtze River: Chinese paddlefish (declared extinct 2022), baiji dolphin (functionally extinct).</a:t>
+            </a:r>
+            <a:endParaRPr lang="en-US" sz="1600" dirty="0"/>
+          </a:p>
+          <a:p>
+            <a:pPr marL="342900" indent="-342900">
+              <a:spcAft>
+                <a:spcPts val="800"/>
+              </a:spcAft>
+              <a:buSzPct val="100000"/>
+              <a:buChar char="•"/>
+            </a:pPr>
+            <a:r>
+              <a:rPr lang="en-US" sz="1600" dirty="0">
+                <a:solidFill>
+                  <a:srgbClr val="3D3A36"/>
+                </a:solidFill>
+                <a:latin typeface="Calibri" pitchFamily="34" charset="0"/>
+                <a:ea typeface="Calibri" pitchFamily="34" charset="-122"/>
+                <a:cs typeface="Calibri" pitchFamily="34" charset="-120"/>
+              </a:rPr>
+              <a:t>Korean Demilitarised Zone: accidentally became a biodiversity hotspot.</a:t>
+            </a:r>
+            <a:endParaRPr lang="en-US" sz="1600" dirty="0"/>
+          </a:p>
+        </p:txBody>
+      </p:sp>
+    </p:spTree>
+  </p:cSld>
+  <p:clrMapOvr>
+    <a:masterClrMapping/>
+  </p:clrMapOvr>
+</p:sld>
+</file>
+
+<file path=ppt/slides/slide6.xml><?xml version="1.0" encoding="utf-8"?>
+<p:sld xmlns:a="http://schemas.openxmlformats.org/drawingml/2006/main" xmlns:r="http://schemas.openxmlformats.org/officeDocument/2006/relationships" xmlns:p="http://schemas.openxmlformats.org/presentationml/2006/main">
+  <p:cSld name="Slide 6">
+    <p:bg>
+      <p:bgPr>
+        <a:solidFill>
+          <a:srgbClr val="FAF8F5"/>
+        </a:solidFill>
+      </p:bgPr>
+    </p:bg>
+    <p:spTree>
+      <p:nvGrpSpPr>
+        <p:cNvPr id="1" name=""/>
+        <p:cNvGrpSpPr/>
+        <p:nvPr/>
+      </p:nvGrpSpPr>
+      <p:grpSpPr>
+        <a:xfrm>
+          <a:off x="0" y="0"/>
+          <a:ext cx="0" cy="0"/>
+          <a:chOff x="0" y="0"/>
+          <a:chExt cx="0" cy="0"/>
+        </a:xfrm>
+      </p:grpSpPr>
+      <p:sp>
+        <p:nvSpPr>
+          <p:cNvPr id="2" name="Shape 0"/>
+          <p:cNvSpPr/>
+          <p:nvPr/>
+        </p:nvSpPr>
+        <p:spPr>
+          <a:xfrm>
+            <a:off x="0" y="0"/>
+            <a:ext cx="9144000" cy="822960"/>
+          </a:xfrm>
+          <a:prstGeom prst="rect">
+            <a:avLst/>
+          </a:prstGeom>
+          <a:solidFill>
+            <a:srgbClr val="FFFFFF"/>
+          </a:solidFill>
+          <a:ln/>
+        </p:spPr>
+      </p:sp>
+      <p:sp>
+        <p:nvSpPr>
+          <p:cNvPr id="3" name="Shape 1"/>
+          <p:cNvSpPr/>
+          <p:nvPr/>
+        </p:nvSpPr>
+        <p:spPr>
+          <a:xfrm>
+            <a:off x="0" y="795528"/>
+            <a:ext cx="9144000" cy="27432"/>
+          </a:xfrm>
+          <a:prstGeom prst="rect">
+            <a:avLst/>
+          </a:prstGeom>
+          <a:solidFill>
+            <a:srgbClr val="E9C46A"/>
+          </a:solidFill>
+          <a:ln/>
+        </p:spPr>
+      </p:sp>
+      <p:sp>
+        <p:nvSpPr>
+          <p:cNvPr id="4" name="Text 2"/>
+          <p:cNvSpPr/>
+          <p:nvPr/>
+        </p:nvSpPr>
+        <p:spPr>
+          <a:xfrm>
+            <a:off x="640080" y="91440"/>
+            <a:ext cx="7863840" cy="640080"/>
+          </a:xfrm>
+          <a:prstGeom prst="rect">
+            <a:avLst/>
+          </a:prstGeom>
+          <a:noFill/>
+          <a:ln/>
+        </p:spPr>
+        <p:txBody>
+          <a:bodyPr wrap="square" lIns="0" tIns="0" rIns="0" bIns="0" rtlCol="0" anchor="ctr"/>
+          <a:lstStyle/>
+          <a:p>
+            <a:pPr indent="0" marL="0">
+              <a:buNone/>
+            </a:pPr>
+            <a:r>
+              <a:rPr lang="en-US" sz="2200" b="1" dirty="0">
+                <a:solidFill>
+                  <a:srgbClr val="1B2A4A"/>
+                </a:solidFill>
+                <a:latin typeface="Georgia" pitchFamily="34" charset="0"/>
+                <a:ea typeface="Georgia" pitchFamily="34" charset="-122"/>
+                <a:cs typeface="Georgia" pitchFamily="34" charset="-120"/>
+              </a:rPr>
+              <a:t>What Can Be Done?</a:t>
+            </a:r>
+            <a:endParaRPr lang="en-US" sz="2200" dirty="0"/>
+          </a:p>
+        </p:txBody>
+      </p:sp>
+      <p:sp>
+        <p:nvSpPr>
+          <p:cNvPr id="5" name="Shape 3"/>
+          <p:cNvSpPr/>
+          <p:nvPr/>
+        </p:nvSpPr>
+        <p:spPr>
+          <a:xfrm>
+            <a:off x="457200" y="1005840"/>
+            <a:ext cx="3931920" cy="3657600"/>
+          </a:xfrm>
+          <a:prstGeom prst="rect">
+            <a:avLst/>
+          </a:prstGeom>
+          <a:solidFill>
+            <a:srgbClr val="FFFFFF"/>
+          </a:solidFill>
+          <a:ln/>
+          <a:effectLst>
+            <a:outerShdw sx="100000" sy="100000" kx="0" ky="0" algn="bl" rotWithShape="0" blurRad="76200" dist="25400" dir="8100000">
+              <a:srgbClr val="000000">
+                <a:alpha val="12000"/>
+              </a:srgbClr>
+            </a:outerShdw>
+          </a:effectLst>
+        </p:spPr>
+      </p:sp>
+      <p:sp>
+        <p:nvSpPr>
+          <p:cNvPr id="6" name="Shape 4"/>
+          <p:cNvSpPr/>
+          <p:nvPr/>
+        </p:nvSpPr>
+        <p:spPr>
+          <a:xfrm>
+            <a:off x="457200" y="1005840"/>
+            <a:ext cx="3931920" cy="64008"/>
+          </a:xfrm>
+          <a:prstGeom prst="rect">
+            <a:avLst/>
+          </a:prstGeom>
+          <a:solidFill>
+            <a:srgbClr val="E9C46A"/>
+          </a:solidFill>
+          <a:ln/>
+        </p:spPr>
+      </p:sp>
+      <p:sp>
+        <p:nvSpPr>
+          <p:cNvPr id="7" name="Text 5"/>
+          <p:cNvSpPr/>
+          <p:nvPr/>
+        </p:nvSpPr>
+        <p:spPr>
+          <a:xfrm>
+            <a:off x="640080" y="1188720"/>
+            <a:ext cx="3566160" cy="457200"/>
+          </a:xfrm>
+          <a:prstGeom prst="rect">
+            <a:avLst/>
+          </a:prstGeom>
+          <a:noFill/>
+          <a:ln/>
+        </p:spPr>
+        <p:txBody>
+          <a:bodyPr wrap="square" rtlCol="0" anchor="ctr"/>
+          <a:lstStyle/>
+          <a:p>
+            <a:pPr indent="0" marL="0">
+              <a:buNone/>
+            </a:pPr>
+            <a:r>
+              <a:rPr lang="en-US" sz="1600" b="1" dirty="0">
+                <a:solidFill>
+                  <a:srgbClr val="E9C46A"/>
+                </a:solidFill>
+                <a:latin typeface="Calibri" pitchFamily="34" charset="0"/>
+                <a:ea typeface="Calibri" pitchFamily="34" charset="-122"/>
+                <a:cs typeface="Calibri" pitchFamily="34" charset="-120"/>
+              </a:rPr>
+              <a:t>Conservation</a:t>
+            </a:r>
+            <a:endParaRPr lang="en-US" sz="1600" dirty="0"/>
+          </a:p>
+        </p:txBody>
+      </p:sp>
+      <p:sp>
+        <p:nvSpPr>
+          <p:cNvPr id="8" name="Text 6"/>
+          <p:cNvSpPr/>
+          <p:nvPr/>
+        </p:nvSpPr>
+        <p:spPr>
+          <a:xfrm>
+            <a:off x="640080" y="1691640"/>
+            <a:ext cx="3566160" cy="2743200"/>
+          </a:xfrm>
+          <a:prstGeom prst="rect">
+            <a:avLst/>
+          </a:prstGeom>
+          <a:noFill/>
+          <a:ln/>
+        </p:spPr>
+        <p:txBody>
+          <a:bodyPr wrap="square" rtlCol="0" anchor="ctr"/>
+          <a:lstStyle/>
+          <a:p>
+            <a:pPr marL="342900" indent="-342900">
+              <a:spcAft>
+                <a:spcPts val="600"/>
+              </a:spcAft>
+              <a:buSzPct val="100000"/>
+              <a:buChar char="•"/>
+            </a:pPr>
+            <a:r>
+              <a:rPr lang="en-US" sz="1400" dirty="0">
+                <a:solidFill>
+                  <a:srgbClr val="3D3A36"/>
+                </a:solidFill>
+                <a:latin typeface="Calibri" pitchFamily="34" charset="0"/>
+                <a:ea typeface="Calibri" pitchFamily="34" charset="-122"/>
+                <a:cs typeface="Calibri" pitchFamily="34" charset="-120"/>
+              </a:rPr>
+              <a:t>China's giant panda: ~1,100 → ~1,800 through conservation.</a:t>
+            </a:r>
+            <a:endParaRPr lang="en-US" sz="1400" dirty="0"/>
+          </a:p>
+          <a:p>
+            <a:pPr marL="342900" indent="-342900">
+              <a:spcAft>
+                <a:spcPts val="600"/>
+              </a:spcAft>
+              <a:buSzPct val="100000"/>
+              <a:buChar char="•"/>
+            </a:pPr>
+            <a:r>
+              <a:rPr lang="en-US" sz="1400" dirty="0">
+                <a:solidFill>
+                  <a:srgbClr val="3D3A36"/>
+                </a:solidFill>
+                <a:latin typeface="Calibri" pitchFamily="34" charset="0"/>
+                <a:ea typeface="Calibri" pitchFamily="34" charset="-122"/>
+                <a:cs typeface="Calibri" pitchFamily="34" charset="-120"/>
+              </a:rPr>
+              <a:t>10-year Yangtze fishing ban (2021–2031).</a:t>
+            </a:r>
+            <a:endParaRPr lang="en-US" sz="1400" dirty="0"/>
+          </a:p>
+          <a:p>
+            <a:pPr marL="342900" indent="-342900">
+              <a:spcAft>
+                <a:spcPts val="600"/>
+              </a:spcAft>
+              <a:buSzPct val="100000"/>
+              <a:buChar char="•"/>
+            </a:pPr>
+            <a:r>
+              <a:rPr lang="en-US" sz="1400" dirty="0">
+                <a:solidFill>
+                  <a:srgbClr val="3D3A36"/>
+                </a:solidFill>
+                <a:latin typeface="Calibri" pitchFamily="34" charset="0"/>
+                <a:ea typeface="Calibri" pitchFamily="34" charset="-122"/>
+                <a:cs typeface="Calibri" pitchFamily="34" charset="-120"/>
+              </a:rPr>
+              <a:t>Korea's DMZ Peace Park proposals.</a:t>
+            </a:r>
+            <a:endParaRPr lang="en-US" sz="1400" dirty="0"/>
+          </a:p>
+          <a:p>
+            <a:pPr marL="342900" indent="-342900">
+              <a:spcAft>
+                <a:spcPts val="600"/>
+              </a:spcAft>
+              <a:buSzPct val="100000"/>
+              <a:buChar char="•"/>
+            </a:pPr>
+            <a:r>
+              <a:rPr lang="en-US" sz="1400" dirty="0">
+                <a:solidFill>
+                  <a:srgbClr val="3D3A36"/>
+                </a:solidFill>
+                <a:latin typeface="Calibri" pitchFamily="34" charset="0"/>
+                <a:ea typeface="Calibri" pitchFamily="34" charset="-122"/>
+                <a:cs typeface="Calibri" pitchFamily="34" charset="-120"/>
+              </a:rPr>
+              <a:t>Germany's Energiewende (energy transition).</a:t>
+            </a:r>
+            <a:endParaRPr lang="en-US" sz="1400" dirty="0"/>
+          </a:p>
+        </p:txBody>
+      </p:sp>
+      <p:sp>
+        <p:nvSpPr>
+          <p:cNvPr id="9" name="Shape 7"/>
+          <p:cNvSpPr/>
+          <p:nvPr/>
+        </p:nvSpPr>
+        <p:spPr>
+          <a:xfrm>
+            <a:off x="4754880" y="1005840"/>
+            <a:ext cx="3931920" cy="3657600"/>
+          </a:xfrm>
+          <a:prstGeom prst="rect">
+            <a:avLst/>
+          </a:prstGeom>
+          <a:solidFill>
+            <a:srgbClr val="FFFFFF"/>
+          </a:solidFill>
+          <a:ln/>
+          <a:effectLst>
+            <a:outerShdw sx="100000" sy="100000" kx="0" ky="0" algn="bl" rotWithShape="0" blurRad="76200" dist="25400" dir="8100000">
+              <a:srgbClr val="000000">
+                <a:alpha val="12000"/>
+              </a:srgbClr>
+            </a:outerShdw>
+          </a:effectLst>
+        </p:spPr>
+      </p:sp>
+      <p:sp>
+        <p:nvSpPr>
+          <p:cNvPr id="10" name="Shape 8"/>
+          <p:cNvSpPr/>
+          <p:nvPr/>
+        </p:nvSpPr>
+        <p:spPr>
+          <a:xfrm>
+            <a:off x="4754880" y="1005840"/>
+            <a:ext cx="3931920" cy="64008"/>
+          </a:xfrm>
+          <a:prstGeom prst="rect">
+            <a:avLst/>
+          </a:prstGeom>
+          <a:solidFill>
+            <a:srgbClr val="E9C46A"/>
+          </a:solidFill>
+          <a:ln/>
+        </p:spPr>
+      </p:sp>
+      <p:sp>
+        <p:nvSpPr>
+          <p:cNvPr id="11" name="Text 9"/>
+          <p:cNvSpPr/>
+          <p:nvPr/>
+        </p:nvSpPr>
+        <p:spPr>
+          <a:xfrm>
+            <a:off x="4937760" y="1188720"/>
+            <a:ext cx="3566160" cy="457200"/>
+          </a:xfrm>
+          <a:prstGeom prst="rect">
+            <a:avLst/>
+          </a:prstGeom>
+          <a:noFill/>
+          <a:ln/>
+        </p:spPr>
+        <p:txBody>
+          <a:bodyPr wrap="square" rtlCol="0" anchor="ctr"/>
+          <a:lstStyle/>
+          <a:p>
+            <a:pPr indent="0" marL="0">
+              <a:buNone/>
+            </a:pPr>
+            <a:r>
+              <a:rPr lang="en-US" sz="1600" b="1" dirty="0">
+                <a:solidFill>
+                  <a:srgbClr val="E9C46A"/>
+                </a:solidFill>
+                <a:latin typeface="Calibri" pitchFamily="34" charset="0"/>
+                <a:ea typeface="Calibri" pitchFamily="34" charset="-122"/>
+                <a:cs typeface="Calibri" pitchFamily="34" charset="-120"/>
+              </a:rPr>
+              <a:t>Sustainability</a:t>
+            </a:r>
+            <a:endParaRPr lang="en-US" sz="1600" dirty="0"/>
+          </a:p>
+        </p:txBody>
+      </p:sp>
+      <p:sp>
+        <p:nvSpPr>
+          <p:cNvPr id="12" name="Text 10"/>
+          <p:cNvSpPr/>
+          <p:nvPr/>
+        </p:nvSpPr>
+        <p:spPr>
+          <a:xfrm>
+            <a:off x="4937760" y="1691640"/>
+            <a:ext cx="3566160" cy="2743200"/>
+          </a:xfrm>
+          <a:prstGeom prst="rect">
+            <a:avLst/>
+          </a:prstGeom>
+          <a:noFill/>
+          <a:ln/>
+        </p:spPr>
+        <p:txBody>
+          <a:bodyPr wrap="square" rtlCol="0" anchor="ctr"/>
+          <a:lstStyle/>
+          <a:p>
+            <a:pPr marL="342900" indent="-342900">
+              <a:spcAft>
+                <a:spcPts val="600"/>
+              </a:spcAft>
+              <a:buSzPct val="100000"/>
+              <a:buChar char="•"/>
+            </a:pPr>
+            <a:r>
+              <a:rPr lang="en-US" sz="1400" dirty="0">
+                <a:solidFill>
+                  <a:srgbClr val="3D3A36"/>
+                </a:solidFill>
+                <a:latin typeface="Calibri" pitchFamily="34" charset="0"/>
+                <a:ea typeface="Calibri" pitchFamily="34" charset="-122"/>
+                <a:cs typeface="Calibri" pitchFamily="34" charset="-120"/>
+              </a:rPr>
+              <a:t>China: world's largest solar panel producer.</a:t>
+            </a:r>
+            <a:endParaRPr lang="en-US" sz="1400" dirty="0"/>
+          </a:p>
+          <a:p>
+            <a:pPr marL="342900" indent="-342900">
+              <a:spcAft>
+                <a:spcPts val="600"/>
+              </a:spcAft>
+              <a:buSzPct val="100000"/>
+              <a:buChar char="•"/>
+            </a:pPr>
+            <a:r>
+              <a:rPr lang="en-US" sz="1400" dirty="0">
+                <a:solidFill>
+                  <a:srgbClr val="3D3A36"/>
+                </a:solidFill>
+                <a:latin typeface="Calibri" pitchFamily="34" charset="0"/>
+                <a:ea typeface="Calibri" pitchFamily="34" charset="-122"/>
+                <a:cs typeface="Calibri" pitchFamily="34" charset="-120"/>
+              </a:rPr>
+              <a:t>Korea: Green New Deal investments.</a:t>
+            </a:r>
+            <a:endParaRPr lang="en-US" sz="1400" dirty="0"/>
+          </a:p>
+          <a:p>
+            <a:pPr marL="342900" indent="-342900">
+              <a:spcAft>
+                <a:spcPts val="600"/>
+              </a:spcAft>
+              <a:buSzPct val="100000"/>
+              <a:buChar char="•"/>
+            </a:pPr>
+            <a:r>
+              <a:rPr lang="en-US" sz="1400" dirty="0">
+                <a:solidFill>
+                  <a:srgbClr val="3D3A36"/>
+                </a:solidFill>
+                <a:latin typeface="Calibri" pitchFamily="34" charset="0"/>
+                <a:ea typeface="Calibri" pitchFamily="34" charset="-122"/>
+                <a:cs typeface="Calibri" pitchFamily="34" charset="-120"/>
+              </a:rPr>
+              <a:t>Germany: 46% renewable electricity.</a:t>
+            </a:r>
+            <a:endParaRPr lang="en-US" sz="1400" dirty="0"/>
+          </a:p>
+          <a:p>
+            <a:pPr marL="342900" indent="-342900">
+              <a:spcAft>
+                <a:spcPts val="600"/>
+              </a:spcAft>
+              <a:buSzPct val="100000"/>
+              <a:buChar char="•"/>
+            </a:pPr>
+            <a:r>
+              <a:rPr lang="en-US" sz="1400" dirty="0">
+                <a:solidFill>
+                  <a:srgbClr val="3D3A36"/>
+                </a:solidFill>
+                <a:latin typeface="Calibri" pitchFamily="34" charset="0"/>
+                <a:ea typeface="Calibri" pitchFamily="34" charset="-122"/>
+                <a:cs typeface="Calibri" pitchFamily="34" charset="-120"/>
+              </a:rPr>
+              <a:t>Individual choices: reduce, reuse, recycle.</a:t>
+            </a:r>
+            <a:endParaRPr lang="en-US" sz="1400" dirty="0"/>
+          </a:p>
+        </p:txBody>
+      </p:sp>
+    </p:spTree>
+  </p:cSld>
+  <p:clrMapOvr>
+    <a:masterClrMapping/>
+  </p:clrMapOvr>
+</p:sld>
+</file>
+
+<file path=ppt/slides/slide7.xml><?xml version="1.0" encoding="utf-8"?>
+<p:sld xmlns:a="http://schemas.openxmlformats.org/drawingml/2006/main" xmlns:r="http://schemas.openxmlformats.org/officeDocument/2006/relationships" xmlns:p="http://schemas.openxmlformats.org/presentationml/2006/main">
+  <p:cSld name="Slide 7">
+    <p:bg>
+      <p:bgPr>
+        <a:solidFill>
+          <a:srgbClr val="FAF8F5"/>
+        </a:solidFill>
+      </p:bgPr>
+    </p:bg>
+    <p:spTree>
+      <p:nvGrpSpPr>
+        <p:cNvPr id="1" name=""/>
+        <p:cNvGrpSpPr/>
+        <p:nvPr/>
+      </p:nvGrpSpPr>
+      <p:grpSpPr>
+        <a:xfrm>
+          <a:off x="0" y="0"/>
+          <a:ext cx="0" cy="0"/>
+          <a:chOff x="0" y="0"/>
+          <a:chExt cx="0" cy="0"/>
+        </a:xfrm>
+      </p:grpSpPr>
+      <p:sp>
+        <p:nvSpPr>
+          <p:cNvPr id="2" name="Shape 0"/>
+          <p:cNvSpPr/>
+          <p:nvPr/>
+        </p:nvSpPr>
+        <p:spPr>
+          <a:xfrm>
+            <a:off x="0" y="0"/>
+            <a:ext cx="9144000" cy="822960"/>
+          </a:xfrm>
+          <a:prstGeom prst="rect">
+            <a:avLst/>
+          </a:prstGeom>
+          <a:solidFill>
+            <a:srgbClr val="FFFFFF"/>
+          </a:solidFill>
+          <a:ln/>
+        </p:spPr>
+      </p:sp>
+      <p:sp>
+        <p:nvSpPr>
+          <p:cNvPr id="3" name="Shape 1"/>
+          <p:cNvSpPr/>
+          <p:nvPr/>
+        </p:nvSpPr>
+        <p:spPr>
+          <a:xfrm>
+            <a:off x="0" y="795528"/>
+            <a:ext cx="9144000" cy="27432"/>
+          </a:xfrm>
+          <a:prstGeom prst="rect">
+            <a:avLst/>
+          </a:prstGeom>
+          <a:solidFill>
+            <a:srgbClr val="E9C46A"/>
+          </a:solidFill>
+          <a:ln/>
+        </p:spPr>
+      </p:sp>
+      <p:sp>
+        <p:nvSpPr>
+          <p:cNvPr id="4" name="Text 2"/>
+          <p:cNvSpPr/>
+          <p:nvPr/>
+        </p:nvSpPr>
+        <p:spPr>
+          <a:xfrm>
+            <a:off x="640080" y="91440"/>
+            <a:ext cx="7863840" cy="640080"/>
+          </a:xfrm>
+          <a:prstGeom prst="rect">
+            <a:avLst/>
+          </a:prstGeom>
+          <a:noFill/>
+          <a:ln/>
+        </p:spPr>
+        <p:txBody>
+          <a:bodyPr wrap="square" lIns="0" tIns="0" rIns="0" bIns="0" rtlCol="0" anchor="ctr"/>
+          <a:lstStyle/>
+          <a:p>
+            <a:pPr indent="0" marL="0">
+              <a:buNone/>
+            </a:pPr>
+            <a:r>
+              <a:rPr lang="en-US" sz="2200" b="1" dirty="0">
+                <a:solidFill>
+                  <a:srgbClr val="1B2A4A"/>
+                </a:solidFill>
+                <a:latin typeface="Georgia" pitchFamily="34" charset="0"/>
+                <a:ea typeface="Georgia" pitchFamily="34" charset="-122"/>
+                <a:cs typeface="Georgia" pitchFamily="34" charset="-120"/>
+              </a:rPr>
+              <a:t>Local Connections</a:t>
+            </a:r>
+            <a:endParaRPr lang="en-US" sz="2200" dirty="0"/>
+          </a:p>
+        </p:txBody>
+      </p:sp>
+      <p:sp>
+        <p:nvSpPr>
+          <p:cNvPr id="5" name="Text 3"/>
+          <p:cNvSpPr/>
+          <p:nvPr/>
+        </p:nvSpPr>
+        <p:spPr>
+          <a:xfrm>
+            <a:off x="640080" y="1005840"/>
+            <a:ext cx="7863840" cy="2926080"/>
+          </a:xfrm>
+          <a:prstGeom prst="rect">
+            <a:avLst/>
+          </a:prstGeom>
+          <a:noFill/>
+          <a:ln/>
+        </p:spPr>
+        <p:txBody>
+          <a:bodyPr wrap="square" rtlCol="0" anchor="ctr"/>
+          <a:lstStyle/>
+          <a:p>
+            <a:pPr marL="342900" indent="-342900">
+              <a:spcAft>
+                <a:spcPts val="800"/>
+              </a:spcAft>
+              <a:buSzPct val="100000"/>
+              <a:buChar char="•"/>
+            </a:pPr>
+            <a:r>
+              <a:rPr lang="en-US" sz="1600" dirty="0">
+                <a:solidFill>
+                  <a:srgbClr val="3D3A36"/>
+                </a:solidFill>
+                <a:latin typeface="Calibri" pitchFamily="34" charset="0"/>
+                <a:ea typeface="Calibri" pitchFamily="34" charset="-122"/>
+                <a:cs typeface="Calibri" pitchFamily="34" charset="-120"/>
+              </a:rPr>
+              <a:t>Nanjing: Zhongshan forest (紫金山) — vital urban green space.</a:t>
+            </a:r>
+            <a:endParaRPr lang="en-US" sz="1600" dirty="0"/>
+          </a:p>
+          <a:p>
+            <a:pPr marL="342900" indent="-342900">
+              <a:spcAft>
+                <a:spcPts val="800"/>
+              </a:spcAft>
+              <a:buSzPct val="100000"/>
+              <a:buChar char="•"/>
+            </a:pPr>
+            <a:r>
+              <a:rPr lang="en-US" sz="1600" dirty="0">
+                <a:solidFill>
+                  <a:srgbClr val="3D3A36"/>
+                </a:solidFill>
+                <a:latin typeface="Calibri" pitchFamily="34" charset="0"/>
+                <a:ea typeface="Calibri" pitchFamily="34" charset="-122"/>
+                <a:cs typeface="Calibri" pitchFamily="34" charset="-120"/>
+              </a:rPr>
+              <a:t>Yangtze River protection laws reducing pollution.</a:t>
+            </a:r>
+            <a:endParaRPr lang="en-US" sz="1600" dirty="0"/>
+          </a:p>
+          <a:p>
+            <a:pPr marL="342900" indent="-342900">
+              <a:spcAft>
+                <a:spcPts val="800"/>
+              </a:spcAft>
+              <a:buSzPct val="100000"/>
+              <a:buChar char="•"/>
+            </a:pPr>
+            <a:r>
+              <a:rPr lang="en-US" sz="1600" dirty="0">
+                <a:solidFill>
+                  <a:srgbClr val="3D3A36"/>
+                </a:solidFill>
+                <a:latin typeface="Calibri" pitchFamily="34" charset="0"/>
+                <a:ea typeface="Calibri" pitchFamily="34" charset="-122"/>
+                <a:cs typeface="Calibri" pitchFamily="34" charset="-120"/>
+              </a:rPr>
+              <a:t>Korea: Saemangeum tidal flat restoration debate.</a:t>
+            </a:r>
+            <a:endParaRPr lang="en-US" sz="1600" dirty="0"/>
+          </a:p>
+          <a:p>
+            <a:pPr marL="342900" indent="-342900">
+              <a:spcAft>
+                <a:spcPts val="800"/>
+              </a:spcAft>
+              <a:buSzPct val="100000"/>
+              <a:buChar char="•"/>
+            </a:pPr>
+            <a:r>
+              <a:rPr lang="en-US" sz="1600" dirty="0">
+                <a:solidFill>
+                  <a:srgbClr val="3D3A36"/>
+                </a:solidFill>
+                <a:latin typeface="Calibri" pitchFamily="34" charset="0"/>
+                <a:ea typeface="Calibri" pitchFamily="34" charset="-122"/>
+                <a:cs typeface="Calibri" pitchFamily="34" charset="-120"/>
+              </a:rPr>
+              <a:t>Germany: Black Forest (Schwarzwald) acid rain recovery — a success story.</a:t>
+            </a:r>
+            <a:endParaRPr lang="en-US" sz="1600" dirty="0"/>
+          </a:p>
+        </p:txBody>
+      </p:sp>
+      <p:sp>
+        <p:nvSpPr>
+          <p:cNvPr id="6" name="Shape 4"/>
+          <p:cNvSpPr/>
+          <p:nvPr/>
+        </p:nvSpPr>
+        <p:spPr>
+          <a:xfrm>
+            <a:off x="640080" y="4114800"/>
+            <a:ext cx="7863840" cy="731520"/>
+          </a:xfrm>
+          <a:prstGeom prst="rect">
+            <a:avLst/>
+          </a:prstGeom>
+          <a:solidFill>
+            <a:srgbClr val="E8F5F3"/>
+          </a:solidFill>
+          <a:ln/>
+          <a:effectLst>
+            <a:outerShdw sx="100000" sy="100000" kx="0" ky="0" algn="bl" rotWithShape="0" blurRad="76200" dist="25400" dir="8100000">
+              <a:srgbClr val="000000">
+                <a:alpha val="12000"/>
+              </a:srgbClr>
+            </a:outerShdw>
+          </a:effectLst>
+        </p:spPr>
+      </p:sp>
+      <p:sp>
+        <p:nvSpPr>
+          <p:cNvPr id="7" name="Shape 5"/>
+          <p:cNvSpPr/>
+          <p:nvPr/>
+        </p:nvSpPr>
+        <p:spPr>
+          <a:xfrm>
+            <a:off x="640080" y="4114800"/>
+            <a:ext cx="64008" cy="731520"/>
+          </a:xfrm>
+          <a:prstGeom prst="rect">
+            <a:avLst/>
+          </a:prstGeom>
+          <a:solidFill>
+            <a:srgbClr val="E9C46A"/>
+          </a:solidFill>
+          <a:ln/>
+        </p:spPr>
+      </p:sp>
+      <p:sp>
+        <p:nvSpPr>
+          <p:cNvPr id="8" name="Text 6"/>
+          <p:cNvSpPr/>
+          <p:nvPr/>
+        </p:nvSpPr>
+        <p:spPr>
+          <a:xfrm>
+            <a:off x="914400" y="4160520"/>
+            <a:ext cx="7406640" cy="640080"/>
+          </a:xfrm>
+          <a:prstGeom prst="rect">
+            <a:avLst/>
+          </a:prstGeom>
+          <a:noFill/>
+          <a:ln/>
+        </p:spPr>
+        <p:txBody>
+          <a:bodyPr wrap="square" rtlCol="0" anchor="ctr"/>
+          <a:lstStyle/>
+          <a:p>
+            <a:pPr indent="0" marL="0">
+              <a:buNone/>
+            </a:pPr>
+            <a:r>
+              <a:rPr lang="en-US" sz="1300" i="1" dirty="0">
+                <a:solidFill>
+                  <a:srgbClr val="3D3A36"/>
+                </a:solidFill>
+                <a:latin typeface="Calibri" pitchFamily="34" charset="0"/>
+                <a:ea typeface="Calibri" pitchFamily="34" charset="-122"/>
+                <a:cs typeface="Calibri" pitchFamily="34" charset="-120"/>
+              </a:rPr>
+              <a:t>Nanjing's Purple Mountain (紫金山) supports over 2,000 plant species.</a:t>
+            </a:r>
+            <a:endParaRPr lang="en-US" sz="1300" dirty="0"/>
+          </a:p>
+        </p:txBody>
+      </p:sp>
+    </p:spTree>
+  </p:cSld>
+  <p:clrMapOvr>
+    <a:masterClrMapping/>
+  </p:clrMapOvr>
+</p:sld>
+</file>
+
+<file path=ppt/slides/slide8.xml><?xml version="1.0" encoding="utf-8"?>
+<p:sld xmlns:a="http://schemas.openxmlformats.org/drawingml/2006/main" xmlns:r="http://schemas.openxmlformats.org/officeDocument/2006/relationships" xmlns:p="http://schemas.openxmlformats.org/presentationml/2006/main">
+  <p:cSld name="Slide 8">
+    <p:bg>
+      <p:bgPr>
+        <a:solidFill>
+          <a:srgbClr val="FAF8F5"/>
+        </a:solidFill>
+      </p:bgPr>
+    </p:bg>
+    <p:spTree>
+      <p:nvGrpSpPr>
+        <p:cNvPr id="1" name=""/>
+        <p:cNvGrpSpPr/>
+        <p:nvPr/>
+      </p:nvGrpSpPr>
+      <p:grpSpPr>
+        <a:xfrm>
+          <a:off x="0" y="0"/>
+          <a:ext cx="0" cy="0"/>
+          <a:chOff x="0" y="0"/>
+          <a:chExt cx="0" cy="0"/>
+        </a:xfrm>
+      </p:grpSpPr>
+      <p:sp>
+        <p:nvSpPr>
+          <p:cNvPr id="2" name="Shape 0"/>
+          <p:cNvSpPr/>
+          <p:nvPr/>
+        </p:nvSpPr>
+        <p:spPr>
+          <a:xfrm>
+            <a:off x="0" y="0"/>
+            <a:ext cx="9144000" cy="822960"/>
+          </a:xfrm>
+          <a:prstGeom prst="rect">
+            <a:avLst/>
+          </a:prstGeom>
+          <a:solidFill>
+            <a:srgbClr val="FFFFFF"/>
+          </a:solidFill>
+          <a:ln/>
+        </p:spPr>
+      </p:sp>
+      <p:sp>
+        <p:nvSpPr>
+          <p:cNvPr id="3" name="Shape 1"/>
+          <p:cNvSpPr/>
+          <p:nvPr/>
+        </p:nvSpPr>
+        <p:spPr>
+          <a:xfrm>
+            <a:off x="0" y="795528"/>
+            <a:ext cx="9144000" cy="27432"/>
+          </a:xfrm>
+          <a:prstGeom prst="rect">
+            <a:avLst/>
+          </a:prstGeom>
+          <a:solidFill>
+            <a:srgbClr val="E9C46A"/>
+          </a:solidFill>
+          <a:ln/>
+        </p:spPr>
+      </p:sp>
+      <p:sp>
+        <p:nvSpPr>
+          <p:cNvPr id="4" name="Text 2"/>
+          <p:cNvSpPr/>
+          <p:nvPr/>
+        </p:nvSpPr>
+        <p:spPr>
+          <a:xfrm>
+            <a:off x="640080" y="91440"/>
+            <a:ext cx="7863840" cy="640080"/>
+          </a:xfrm>
+          <a:prstGeom prst="rect">
+            <a:avLst/>
+          </a:prstGeom>
+          <a:noFill/>
+          <a:ln/>
+        </p:spPr>
+        <p:txBody>
+          <a:bodyPr wrap="square" lIns="0" tIns="0" rIns="0" bIns="0" rtlCol="0" anchor="ctr"/>
+          <a:lstStyle/>
+          <a:p>
+            <a:pPr indent="0" marL="0">
+              <a:buNone/>
+            </a:pPr>
+            <a:r>
+              <a:rPr lang="en-US" sz="2200" b="1" dirty="0">
+                <a:solidFill>
+                  <a:srgbClr val="1B2A4A"/>
+                </a:solidFill>
+                <a:latin typeface="Georgia" pitchFamily="34" charset="0"/>
+                <a:ea typeface="Georgia" pitchFamily="34" charset="-122"/>
+                <a:cs typeface="Georgia" pitchFamily="34" charset="-120"/>
+              </a:rPr>
+              <a:t>Recommended Videos</a:t>
+            </a:r>
+            <a:endParaRPr lang="en-US" sz="2200" dirty="0"/>
+          </a:p>
+        </p:txBody>
+      </p:sp>
+      <p:sp>
+        <p:nvSpPr>
+          <p:cNvPr id="5" name="Text 3"/>
+          <p:cNvSpPr/>
+          <p:nvPr/>
+        </p:nvSpPr>
+        <p:spPr>
+          <a:xfrm>
+            <a:off x="640080" y="868680"/>
+            <a:ext cx="7863840" cy="274320"/>
+          </a:xfrm>
+          <a:prstGeom prst="rect">
+            <a:avLst/>
+          </a:prstGeom>
+          <a:noFill/>
+          <a:ln/>
+        </p:spPr>
+        <p:txBody>
+          <a:bodyPr wrap="square" rtlCol="0" anchor="ctr"/>
+          <a:lstStyle/>
+          <a:p>
+            <a:pPr indent="0" marL="0">
+              <a:buNone/>
+            </a:pPr>
+            <a:r>
+              <a:rPr lang="en-US" sz="1200" i="1" dirty="0">
+                <a:solidFill>
+                  <a:srgbClr val="6B6660"/>
+                </a:solidFill>
+                <a:latin typeface="Calibri" pitchFamily="34" charset="0"/>
+                <a:ea typeface="Calibri" pitchFamily="34" charset="-122"/>
+                <a:cs typeface="Calibri" pitchFamily="34" charset="-120"/>
+              </a:rPr>
+              <a:t>Search these on YouTube to learn more.</a:t>
+            </a:r>
+            <a:endParaRPr lang="en-US" sz="1200" dirty="0"/>
+          </a:p>
+        </p:txBody>
+      </p:sp>
+      <p:sp>
+        <p:nvSpPr>
+          <p:cNvPr id="6" name="Shape 4"/>
+          <p:cNvSpPr/>
+          <p:nvPr/>
+        </p:nvSpPr>
+        <p:spPr>
+          <a:xfrm>
+            <a:off x="457200" y="1234440"/>
+            <a:ext cx="8229600" cy="841248"/>
+          </a:xfrm>
+          <a:prstGeom prst="rect">
+            <a:avLst/>
+          </a:prstGeom>
+          <a:solidFill>
+            <a:srgbClr val="FFFFFF"/>
+          </a:solidFill>
+          <a:ln/>
+          <a:effectLst>
+            <a:outerShdw sx="100000" sy="100000" kx="0" ky="0" algn="bl" rotWithShape="0" blurRad="76200" dist="25400" dir="8100000">
+              <a:srgbClr val="000000">
+                <a:alpha val="12000"/>
+              </a:srgbClr>
+            </a:outerShdw>
+          </a:effectLst>
+        </p:spPr>
+      </p:sp>
+      <p:sp>
+        <p:nvSpPr>
+          <p:cNvPr id="7" name="Shape 5"/>
+          <p:cNvSpPr/>
+          <p:nvPr/>
+        </p:nvSpPr>
+        <p:spPr>
+          <a:xfrm>
+            <a:off x="457200" y="1234440"/>
+            <a:ext cx="64008" cy="841248"/>
+          </a:xfrm>
+          <a:prstGeom prst="rect">
+            <a:avLst/>
+          </a:prstGeom>
+          <a:solidFill>
+            <a:srgbClr val="E9C46A"/>
+          </a:solidFill>
+          <a:ln/>
+        </p:spPr>
+      </p:sp>
+      <p:sp>
+        <p:nvSpPr>
+          <p:cNvPr id="8" name="Text 6"/>
+          <p:cNvSpPr/>
+          <p:nvPr/>
+        </p:nvSpPr>
+        <p:spPr>
+          <a:xfrm>
+            <a:off x="640080" y="1325880"/>
+            <a:ext cx="457200" cy="457200"/>
           </a:xfrm>
           <a:prstGeom prst="rect">
             <a:avLst/>
@@ -2983,7 +4152,46 @@
               <a:buNone/>
             </a:pPr>
             <a:r>
-              <a:rPr lang="en-US" sz="1800" dirty="0">
+              <a:rPr lang="en-US" sz="2000" dirty="0">
+                <a:solidFill>
+                  <a:srgbClr val="E9C46A"/>
+                </a:solidFill>
+                <a:latin typeface="Calibri" pitchFamily="34" charset="0"/>
+                <a:ea typeface="Calibri" pitchFamily="34" charset="-122"/>
+                <a:cs typeface="Calibri" pitchFamily="34" charset="-120"/>
+              </a:rPr>
+              <a:t>▶</a:t>
+            </a:r>
+            <a:endParaRPr lang="en-US" sz="2000" dirty="0"/>
+          </a:p>
+        </p:txBody>
+      </p:sp>
+      <p:sp>
+        <p:nvSpPr>
+          <p:cNvPr id="9" name="Text 7"/>
+          <p:cNvSpPr/>
+          <p:nvPr/>
+        </p:nvSpPr>
+        <p:spPr>
+          <a:xfrm>
+            <a:off x="1188720" y="1307592"/>
+            <a:ext cx="7132320" cy="411480"/>
+          </a:xfrm>
+          <a:prstGeom prst="rect">
+            <a:avLst/>
+          </a:prstGeom>
+          <a:noFill/>
+          <a:ln/>
+        </p:spPr>
+        <p:txBody>
+          <a:bodyPr wrap="square" rtlCol="0" anchor="ctr"/>
+          <a:lstStyle/>
+          <a:p>
+            <a:pPr indent="0" marL="0">
+              <a:buNone/>
+            </a:pPr>
+            <a:r>
+              <a:rPr lang="en-US" sz="1400" b="1" dirty="0">
                 <a:solidFill>
                   <a:srgbClr val="1B2A4A"/>
                 </a:solidFill>
@@ -2991,22 +4199,108 @@
                 <a:ea typeface="Calibri" pitchFamily="34" charset="-122"/>
                 <a:cs typeface="Calibri" pitchFamily="34" charset="-120"/>
               </a:rPr>
-              <a:t>learnlattice.org/students/exam-revision</a:t>
-            </a:r>
-            <a:endParaRPr lang="en-US" sz="1800" dirty="0"/>
-          </a:p>
-        </p:txBody>
-      </p:sp>
-      <p:sp>
-        <p:nvSpPr>
-          <p:cNvPr id="6" name="Text 4"/>
-          <p:cNvSpPr/>
-          <p:nvPr/>
-        </p:nvSpPr>
-        <p:spPr>
-          <a:xfrm>
-            <a:off x="731520" y="3200400"/>
-            <a:ext cx="7680960" cy="457200"/>
+              <a:t>Is It Too Late to Stop Climate Change?</a:t>
+            </a:r>
+            <a:endParaRPr lang="en-US" sz="1400" dirty="0"/>
+          </a:p>
+        </p:txBody>
+      </p:sp>
+      <p:sp>
+        <p:nvSpPr>
+          <p:cNvPr id="10" name="Text 8"/>
+          <p:cNvSpPr/>
+          <p:nvPr/>
+        </p:nvSpPr>
+        <p:spPr>
+          <a:xfrm>
+            <a:off x="1188720" y="1691640"/>
+            <a:ext cx="7132320" cy="320040"/>
+          </a:xfrm>
+          <a:prstGeom prst="rect">
+            <a:avLst/>
+          </a:prstGeom>
+          <a:noFill/>
+          <a:ln/>
+        </p:spPr>
+        <p:txBody>
+          <a:bodyPr wrap="square" rtlCol="0" anchor="ctr"/>
+          <a:lstStyle/>
+          <a:p>
+            <a:pPr indent="0" marL="0">
+              <a:buNone/>
+            </a:pPr>
+            <a:r>
+              <a:rPr lang="en-US" sz="1100" dirty="0">
+                <a:solidFill>
+                  <a:srgbClr val="6B6660"/>
+                </a:solidFill>
+                <a:latin typeface="Calibri" pitchFamily="34" charset="0"/>
+                <a:ea typeface="Calibri" pitchFamily="34" charset="-122"/>
+                <a:cs typeface="Calibri" pitchFamily="34" charset="-120"/>
+              </a:rPr>
+              <a:t>Kurzgesagt  •  10 min</a:t>
+            </a:r>
+            <a:endParaRPr lang="en-US" sz="1100" dirty="0"/>
+          </a:p>
+        </p:txBody>
+      </p:sp>
+      <p:sp>
+        <p:nvSpPr>
+          <p:cNvPr id="11" name="Shape 9"/>
+          <p:cNvSpPr/>
+          <p:nvPr/>
+        </p:nvSpPr>
+        <p:spPr>
+          <a:xfrm>
+            <a:off x="457200" y="2212848"/>
+            <a:ext cx="8229600" cy="841248"/>
+          </a:xfrm>
+          <a:prstGeom prst="rect">
+            <a:avLst/>
+          </a:prstGeom>
+          <a:solidFill>
+            <a:srgbClr val="FFFFFF"/>
+          </a:solidFill>
+          <a:ln/>
+          <a:effectLst>
+            <a:outerShdw sx="100000" sy="100000" kx="0" ky="0" algn="bl" rotWithShape="0" blurRad="76200" dist="25400" dir="8100000">
+              <a:srgbClr val="000000">
+                <a:alpha val="12000"/>
+              </a:srgbClr>
+            </a:outerShdw>
+          </a:effectLst>
+        </p:spPr>
+      </p:sp>
+      <p:sp>
+        <p:nvSpPr>
+          <p:cNvPr id="12" name="Shape 10"/>
+          <p:cNvSpPr/>
+          <p:nvPr/>
+        </p:nvSpPr>
+        <p:spPr>
+          <a:xfrm>
+            <a:off x="457200" y="2212848"/>
+            <a:ext cx="64008" cy="841248"/>
+          </a:xfrm>
+          <a:prstGeom prst="rect">
+            <a:avLst/>
+          </a:prstGeom>
+          <a:solidFill>
+            <a:srgbClr val="E9C46A"/>
+          </a:solidFill>
+          <a:ln/>
+        </p:spPr>
+      </p:sp>
+      <p:sp>
+        <p:nvSpPr>
+          <p:cNvPr id="13" name="Text 11"/>
+          <p:cNvSpPr/>
+          <p:nvPr/>
+        </p:nvSpPr>
+        <p:spPr>
+          <a:xfrm>
+            <a:off x="640080" y="2304288"/>
+            <a:ext cx="457200" cy="457200"/>
           </a:xfrm>
           <a:prstGeom prst="rect">
             <a:avLst/>
@@ -3022,9 +4316,558 @@
               <a:buNone/>
             </a:pPr>
             <a:r>
-              <a:rPr lang="en-US" sz="1400" dirty="0">
-                <a:solidFill>
-                  <a:srgbClr val="9B9690"/>
+              <a:rPr lang="en-US" sz="2000" dirty="0">
+                <a:solidFill>
+                  <a:srgbClr val="E9C46A"/>
+                </a:solidFill>
+                <a:latin typeface="Calibri" pitchFamily="34" charset="0"/>
+                <a:ea typeface="Calibri" pitchFamily="34" charset="-122"/>
+                <a:cs typeface="Calibri" pitchFamily="34" charset="-120"/>
+              </a:rPr>
+              <a:t>▶</a:t>
+            </a:r>
+            <a:endParaRPr lang="en-US" sz="2000" dirty="0"/>
+          </a:p>
+        </p:txBody>
+      </p:sp>
+      <p:sp>
+        <p:nvSpPr>
+          <p:cNvPr id="14" name="Text 12"/>
+          <p:cNvSpPr/>
+          <p:nvPr/>
+        </p:nvSpPr>
+        <p:spPr>
+          <a:xfrm>
+            <a:off x="1188720" y="2286000"/>
+            <a:ext cx="7132320" cy="411480"/>
+          </a:xfrm>
+          <a:prstGeom prst="rect">
+            <a:avLst/>
+          </a:prstGeom>
+          <a:noFill/>
+          <a:ln/>
+        </p:spPr>
+        <p:txBody>
+          <a:bodyPr wrap="square" rtlCol="0" anchor="ctr"/>
+          <a:lstStyle/>
+          <a:p>
+            <a:pPr indent="0" marL="0">
+              <a:buNone/>
+            </a:pPr>
+            <a:r>
+              <a:rPr lang="en-US" sz="1400" b="1" dirty="0">
+                <a:solidFill>
+                  <a:srgbClr val="1B2A4A"/>
+                </a:solidFill>
+                <a:latin typeface="Calibri" pitchFamily="34" charset="0"/>
+                <a:ea typeface="Calibri" pitchFamily="34" charset="-122"/>
+                <a:cs typeface="Calibri" pitchFamily="34" charset="-120"/>
+              </a:rPr>
+              <a:t>Human Impact on Biodiversity</a:t>
+            </a:r>
+            <a:endParaRPr lang="en-US" sz="1400" dirty="0"/>
+          </a:p>
+        </p:txBody>
+      </p:sp>
+      <p:sp>
+        <p:nvSpPr>
+          <p:cNvPr id="15" name="Text 13"/>
+          <p:cNvSpPr/>
+          <p:nvPr/>
+        </p:nvSpPr>
+        <p:spPr>
+          <a:xfrm>
+            <a:off x="1188720" y="2670048"/>
+            <a:ext cx="7132320" cy="320040"/>
+          </a:xfrm>
+          <a:prstGeom prst="rect">
+            <a:avLst/>
+          </a:prstGeom>
+          <a:noFill/>
+          <a:ln/>
+        </p:spPr>
+        <p:txBody>
+          <a:bodyPr wrap="square" rtlCol="0" anchor="ctr"/>
+          <a:lstStyle/>
+          <a:p>
+            <a:pPr indent="0" marL="0">
+              <a:buNone/>
+            </a:pPr>
+            <a:r>
+              <a:rPr lang="en-US" sz="1100" dirty="0">
+                <a:solidFill>
+                  <a:srgbClr val="6B6660"/>
+                </a:solidFill>
+                <a:latin typeface="Calibri" pitchFamily="34" charset="0"/>
+                <a:ea typeface="Calibri" pitchFamily="34" charset="-122"/>
+                <a:cs typeface="Calibri" pitchFamily="34" charset="-120"/>
+              </a:rPr>
+              <a:t>FuseSchool  •  5 min</a:t>
+            </a:r>
+            <a:endParaRPr lang="en-US" sz="1100" dirty="0"/>
+          </a:p>
+        </p:txBody>
+      </p:sp>
+      <p:sp>
+        <p:nvSpPr>
+          <p:cNvPr id="16" name="Shape 14"/>
+          <p:cNvSpPr/>
+          <p:nvPr/>
+        </p:nvSpPr>
+        <p:spPr>
+          <a:xfrm>
+            <a:off x="457200" y="3191256"/>
+            <a:ext cx="8229600" cy="841248"/>
+          </a:xfrm>
+          <a:prstGeom prst="rect">
+            <a:avLst/>
+          </a:prstGeom>
+          <a:solidFill>
+            <a:srgbClr val="FFFFFF"/>
+          </a:solidFill>
+          <a:ln/>
+          <a:effectLst>
+            <a:outerShdw sx="100000" sy="100000" kx="0" ky="0" algn="bl" rotWithShape="0" blurRad="76200" dist="25400" dir="8100000">
+              <a:srgbClr val="000000">
+                <a:alpha val="12000"/>
+              </a:srgbClr>
+            </a:outerShdw>
+          </a:effectLst>
+        </p:spPr>
+      </p:sp>
+      <p:sp>
+        <p:nvSpPr>
+          <p:cNvPr id="17" name="Shape 15"/>
+          <p:cNvSpPr/>
+          <p:nvPr/>
+        </p:nvSpPr>
+        <p:spPr>
+          <a:xfrm>
+            <a:off x="457200" y="3191256"/>
+            <a:ext cx="64008" cy="841248"/>
+          </a:xfrm>
+          <a:prstGeom prst="rect">
+            <a:avLst/>
+          </a:prstGeom>
+          <a:solidFill>
+            <a:srgbClr val="E9C46A"/>
+          </a:solidFill>
+          <a:ln/>
+        </p:spPr>
+      </p:sp>
+      <p:sp>
+        <p:nvSpPr>
+          <p:cNvPr id="18" name="Text 16"/>
+          <p:cNvSpPr/>
+          <p:nvPr/>
+        </p:nvSpPr>
+        <p:spPr>
+          <a:xfrm>
+            <a:off x="640080" y="3282696"/>
+            <a:ext cx="457200" cy="457200"/>
+          </a:xfrm>
+          <a:prstGeom prst="rect">
+            <a:avLst/>
+          </a:prstGeom>
+          <a:noFill/>
+          <a:ln/>
+        </p:spPr>
+        <p:txBody>
+          <a:bodyPr wrap="square" rtlCol="0" anchor="ctr"/>
+          <a:lstStyle/>
+          <a:p>
+            <a:pPr algn="ctr" indent="0" marL="0">
+              <a:buNone/>
+            </a:pPr>
+            <a:r>
+              <a:rPr lang="en-US" sz="2000" dirty="0">
+                <a:solidFill>
+                  <a:srgbClr val="E9C46A"/>
+                </a:solidFill>
+                <a:latin typeface="Calibri" pitchFamily="34" charset="0"/>
+                <a:ea typeface="Calibri" pitchFamily="34" charset="-122"/>
+                <a:cs typeface="Calibri" pitchFamily="34" charset="-120"/>
+              </a:rPr>
+              <a:t>▶</a:t>
+            </a:r>
+            <a:endParaRPr lang="en-US" sz="2000" dirty="0"/>
+          </a:p>
+        </p:txBody>
+      </p:sp>
+      <p:sp>
+        <p:nvSpPr>
+          <p:cNvPr id="19" name="Text 17"/>
+          <p:cNvSpPr/>
+          <p:nvPr/>
+        </p:nvSpPr>
+        <p:spPr>
+          <a:xfrm>
+            <a:off x="1188720" y="3264408"/>
+            <a:ext cx="7132320" cy="411480"/>
+          </a:xfrm>
+          <a:prstGeom prst="rect">
+            <a:avLst/>
+          </a:prstGeom>
+          <a:noFill/>
+          <a:ln/>
+        </p:spPr>
+        <p:txBody>
+          <a:bodyPr wrap="square" rtlCol="0" anchor="ctr"/>
+          <a:lstStyle/>
+          <a:p>
+            <a:pPr indent="0" marL="0">
+              <a:buNone/>
+            </a:pPr>
+            <a:r>
+              <a:rPr lang="en-US" sz="1400" b="1" dirty="0">
+                <a:solidFill>
+                  <a:srgbClr val="1B2A4A"/>
+                </a:solidFill>
+                <a:latin typeface="Calibri" pitchFamily="34" charset="0"/>
+                <a:ea typeface="Calibri" pitchFamily="34" charset="-122"/>
+                <a:cs typeface="Calibri" pitchFamily="34" charset="-120"/>
+              </a:rPr>
+              <a:t>Can We Fix Climate Change?</a:t>
+            </a:r>
+            <a:endParaRPr lang="en-US" sz="1400" dirty="0"/>
+          </a:p>
+        </p:txBody>
+      </p:sp>
+      <p:sp>
+        <p:nvSpPr>
+          <p:cNvPr id="20" name="Text 18"/>
+          <p:cNvSpPr/>
+          <p:nvPr/>
+        </p:nvSpPr>
+        <p:spPr>
+          <a:xfrm>
+            <a:off x="1188720" y="3648456"/>
+            <a:ext cx="7132320" cy="320040"/>
+          </a:xfrm>
+          <a:prstGeom prst="rect">
+            <a:avLst/>
+          </a:prstGeom>
+          <a:noFill/>
+          <a:ln/>
+        </p:spPr>
+        <p:txBody>
+          <a:bodyPr wrap="square" rtlCol="0" anchor="ctr"/>
+          <a:lstStyle/>
+          <a:p>
+            <a:pPr indent="0" marL="0">
+              <a:buNone/>
+            </a:pPr>
+            <a:r>
+              <a:rPr lang="en-US" sz="1100" dirty="0">
+                <a:solidFill>
+                  <a:srgbClr val="6B6660"/>
+                </a:solidFill>
+                <a:latin typeface="Calibri" pitchFamily="34" charset="0"/>
+                <a:ea typeface="Calibri" pitchFamily="34" charset="-122"/>
+                <a:cs typeface="Calibri" pitchFamily="34" charset="-120"/>
+              </a:rPr>
+              <a:t>Kurzgesagt  •  10 min</a:t>
+            </a:r>
+            <a:endParaRPr lang="en-US" sz="1100" dirty="0"/>
+          </a:p>
+        </p:txBody>
+      </p:sp>
+      <p:sp>
+        <p:nvSpPr>
+          <p:cNvPr id="21" name="Shape 19"/>
+          <p:cNvSpPr/>
+          <p:nvPr/>
+        </p:nvSpPr>
+        <p:spPr>
+          <a:xfrm>
+            <a:off x="457200" y="4169664"/>
+            <a:ext cx="8229600" cy="841248"/>
+          </a:xfrm>
+          <a:prstGeom prst="rect">
+            <a:avLst/>
+          </a:prstGeom>
+          <a:solidFill>
+            <a:srgbClr val="FFFFFF"/>
+          </a:solidFill>
+          <a:ln/>
+          <a:effectLst>
+            <a:outerShdw sx="100000" sy="100000" kx="0" ky="0" algn="bl" rotWithShape="0" blurRad="76200" dist="25400" dir="8100000">
+              <a:srgbClr val="000000">
+                <a:alpha val="12000"/>
+              </a:srgbClr>
+            </a:outerShdw>
+          </a:effectLst>
+        </p:spPr>
+      </p:sp>
+      <p:sp>
+        <p:nvSpPr>
+          <p:cNvPr id="22" name="Shape 20"/>
+          <p:cNvSpPr/>
+          <p:nvPr/>
+        </p:nvSpPr>
+        <p:spPr>
+          <a:xfrm>
+            <a:off x="457200" y="4169664"/>
+            <a:ext cx="64008" cy="841248"/>
+          </a:xfrm>
+          <a:prstGeom prst="rect">
+            <a:avLst/>
+          </a:prstGeom>
+          <a:solidFill>
+            <a:srgbClr val="E9C46A"/>
+          </a:solidFill>
+          <a:ln/>
+        </p:spPr>
+      </p:sp>
+      <p:sp>
+        <p:nvSpPr>
+          <p:cNvPr id="23" name="Text 21"/>
+          <p:cNvSpPr/>
+          <p:nvPr/>
+        </p:nvSpPr>
+        <p:spPr>
+          <a:xfrm>
+            <a:off x="640080" y="4261104"/>
+            <a:ext cx="457200" cy="457200"/>
+          </a:xfrm>
+          <a:prstGeom prst="rect">
+            <a:avLst/>
+          </a:prstGeom>
+          <a:noFill/>
+          <a:ln/>
+        </p:spPr>
+        <p:txBody>
+          <a:bodyPr wrap="square" rtlCol="0" anchor="ctr"/>
+          <a:lstStyle/>
+          <a:p>
+            <a:pPr algn="ctr" indent="0" marL="0">
+              <a:buNone/>
+            </a:pPr>
+            <a:r>
+              <a:rPr lang="en-US" sz="2000" dirty="0">
+                <a:solidFill>
+                  <a:srgbClr val="E9C46A"/>
+                </a:solidFill>
+                <a:latin typeface="Calibri" pitchFamily="34" charset="0"/>
+                <a:ea typeface="Calibri" pitchFamily="34" charset="-122"/>
+                <a:cs typeface="Calibri" pitchFamily="34" charset="-120"/>
+              </a:rPr>
+              <a:t>▶</a:t>
+            </a:r>
+            <a:endParaRPr lang="en-US" sz="2000" dirty="0"/>
+          </a:p>
+        </p:txBody>
+      </p:sp>
+      <p:sp>
+        <p:nvSpPr>
+          <p:cNvPr id="24" name="Text 22"/>
+          <p:cNvSpPr/>
+          <p:nvPr/>
+        </p:nvSpPr>
+        <p:spPr>
+          <a:xfrm>
+            <a:off x="1188720" y="4242816"/>
+            <a:ext cx="7132320" cy="411480"/>
+          </a:xfrm>
+          <a:prstGeom prst="rect">
+            <a:avLst/>
+          </a:prstGeom>
+          <a:noFill/>
+          <a:ln/>
+        </p:spPr>
+        <p:txBody>
+          <a:bodyPr wrap="square" rtlCol="0" anchor="ctr"/>
+          <a:lstStyle/>
+          <a:p>
+            <a:pPr indent="0" marL="0">
+              <a:buNone/>
+            </a:pPr>
+            <a:r>
+              <a:rPr lang="en-US" sz="1400" b="1" dirty="0">
+                <a:solidFill>
+                  <a:srgbClr val="1B2A4A"/>
+                </a:solidFill>
+                <a:latin typeface="Calibri" pitchFamily="34" charset="0"/>
+                <a:ea typeface="Calibri" pitchFamily="34" charset="-122"/>
+                <a:cs typeface="Calibri" pitchFamily="34" charset="-120"/>
+              </a:rPr>
+              <a:t>Deforestation — Causes, Effects, Solutions</a:t>
+            </a:r>
+            <a:endParaRPr lang="en-US" sz="1400" dirty="0"/>
+          </a:p>
+        </p:txBody>
+      </p:sp>
+      <p:sp>
+        <p:nvSpPr>
+          <p:cNvPr id="25" name="Text 23"/>
+          <p:cNvSpPr/>
+          <p:nvPr/>
+        </p:nvSpPr>
+        <p:spPr>
+          <a:xfrm>
+            <a:off x="1188720" y="4626864"/>
+            <a:ext cx="7132320" cy="320040"/>
+          </a:xfrm>
+          <a:prstGeom prst="rect">
+            <a:avLst/>
+          </a:prstGeom>
+          <a:noFill/>
+          <a:ln/>
+        </p:spPr>
+        <p:txBody>
+          <a:bodyPr wrap="square" rtlCol="0" anchor="ctr"/>
+          <a:lstStyle/>
+          <a:p>
+            <a:pPr indent="0" marL="0">
+              <a:buNone/>
+            </a:pPr>
+            <a:r>
+              <a:rPr lang="en-US" sz="1100" dirty="0">
+                <a:solidFill>
+                  <a:srgbClr val="6B6660"/>
+                </a:solidFill>
+                <a:latin typeface="Calibri" pitchFamily="34" charset="0"/>
+                <a:ea typeface="Calibri" pitchFamily="34" charset="-122"/>
+                <a:cs typeface="Calibri" pitchFamily="34" charset="-120"/>
+              </a:rPr>
+              <a:t>National Geographic  •  4 min</a:t>
+            </a:r>
+            <a:endParaRPr lang="en-US" sz="1100" dirty="0"/>
+          </a:p>
+        </p:txBody>
+      </p:sp>
+    </p:spTree>
+  </p:cSld>
+  <p:clrMapOvr>
+    <a:masterClrMapping/>
+  </p:clrMapOvr>
+</p:sld>
+</file>
+
+<file path=ppt/slides/slide9.xml><?xml version="1.0" encoding="utf-8"?>
+<p:sld xmlns:a="http://schemas.openxmlformats.org/drawingml/2006/main" xmlns:r="http://schemas.openxmlformats.org/officeDocument/2006/relationships" xmlns:p="http://schemas.openxmlformats.org/presentationml/2006/main">
+  <p:cSld name="Slide 9">
+    <p:spTree>
+      <p:nvGrpSpPr>
+        <p:cNvPr id="1" name=""/>
+        <p:cNvGrpSpPr/>
+        <p:nvPr/>
+      </p:nvGrpSpPr>
+      <p:grpSpPr>
+        <a:xfrm>
+          <a:off x="0" y="0"/>
+          <a:ext cx="0" cy="0"/>
+          <a:chOff x="0" y="0"/>
+          <a:chExt cx="0" cy="0"/>
+        </a:xfrm>
+      </p:grpSpPr>
+      <p:sp>
+        <p:nvSpPr>
+          <p:cNvPr id="2" name="Shape 0"/>
+          <p:cNvSpPr/>
+          <p:nvPr/>
+        </p:nvSpPr>
+        <p:spPr>
+          <a:xfrm>
+            <a:off x="0" y="0"/>
+            <a:ext cx="9144000" cy="5143500"/>
+          </a:xfrm>
+          <a:prstGeom prst="rect">
+            <a:avLst/>
+          </a:prstGeom>
+          <a:solidFill>
+            <a:srgbClr val="1B2A4A"/>
+          </a:solidFill>
+          <a:ln/>
+        </p:spPr>
+      </p:sp>
+      <p:sp>
+        <p:nvSpPr>
+          <p:cNvPr id="3" name="Shape 1"/>
+          <p:cNvSpPr/>
+          <p:nvPr/>
+        </p:nvSpPr>
+        <p:spPr>
+          <a:xfrm>
+            <a:off x="0" y="4777740"/>
+            <a:ext cx="9144000" cy="365760"/>
+          </a:xfrm>
+          <a:prstGeom prst="rect">
+            <a:avLst/>
+          </a:prstGeom>
+          <a:solidFill>
+            <a:srgbClr val="E9C46A"/>
+          </a:solidFill>
+          <a:ln/>
+        </p:spPr>
+      </p:sp>
+      <p:sp>
+        <p:nvSpPr>
+          <p:cNvPr id="4" name="Text 2"/>
+          <p:cNvSpPr/>
+          <p:nvPr/>
+        </p:nvSpPr>
+        <p:spPr>
+          <a:xfrm>
+            <a:off x="731520" y="1371600"/>
+            <a:ext cx="7680960" cy="914400"/>
+          </a:xfrm>
+          <a:prstGeom prst="rect">
+            <a:avLst/>
+          </a:prstGeom>
+          <a:noFill/>
+          <a:ln/>
+        </p:spPr>
+        <p:txBody>
+          <a:bodyPr wrap="square" rtlCol="0" anchor="ctr"/>
+          <a:lstStyle/>
+          <a:p>
+            <a:pPr algn="ctr" indent="0" marL="0">
+              <a:buNone/>
+            </a:pPr>
+            <a:r>
+              <a:rPr lang="en-US" sz="3600" b="1" dirty="0">
+                <a:solidFill>
+                  <a:srgbClr val="FFFFFF"/>
+                </a:solidFill>
+                <a:latin typeface="Georgia" pitchFamily="34" charset="0"/>
+                <a:ea typeface="Georgia" pitchFamily="34" charset="-122"/>
+                <a:cs typeface="Georgia" pitchFamily="34" charset="-120"/>
+              </a:rPr>
+              <a:t>Review &amp; Practise</a:t>
+            </a:r>
+            <a:endParaRPr lang="en-US" sz="3600" dirty="0"/>
+          </a:p>
+        </p:txBody>
+      </p:sp>
+      <p:sp>
+        <p:nvSpPr>
+          <p:cNvPr id="5" name="Text 3"/>
+          <p:cNvSpPr/>
+          <p:nvPr/>
+        </p:nvSpPr>
+        <p:spPr>
+          <a:xfrm>
+            <a:off x="731520" y="2560320"/>
+            <a:ext cx="7680960" cy="548640"/>
+          </a:xfrm>
+          <a:prstGeom prst="rect">
+            <a:avLst/>
+          </a:prstGeom>
+          <a:noFill/>
+          <a:ln/>
+        </p:spPr>
+        <p:txBody>
+          <a:bodyPr wrap="square" rtlCol="0" anchor="ctr"/>
+          <a:lstStyle/>
+          <a:p>
+            <a:pPr algn="ctr" indent="0" marL="0">
+              <a:buNone/>
+            </a:pPr>
+            <a:r>
+              <a:rPr lang="en-US" sz="2000" dirty="0">
+                <a:solidFill>
+                  <a:srgbClr val="E9C46A"/>
                 </a:solidFill>
                 <a:latin typeface="Calibri" pitchFamily="34" charset="0"/>
                 <a:ea typeface="Calibri" pitchFamily="34" charset="-122"/>
@@ -3032,7 +4875,7 @@
               </a:rPr>
               <a:t>mrzocchi.com</a:t>
             </a:r>
-            <a:endParaRPr lang="en-US" sz="1400" dirty="0"/>
+            <a:endParaRPr lang="en-US" sz="2000" dirty="0"/>
           </a:p>
         </p:txBody>
       </p:sp>
